--- a/slides/APL_Bootcamp-part-7-operators-sysfns.pptx
+++ b/slides/APL_Bootcamp-part-7-operators-sysfns.pptx
@@ -5,10 +5,10 @@
     <p:sldMasterId id="2147483648" r:id="rId1"/>
   </p:sldMasterIdLst>
   <p:notesMasterIdLst>
-    <p:notesMasterId r:id="rId133"/>
+    <p:notesMasterId r:id="rId132"/>
   </p:notesMasterIdLst>
   <p:handoutMasterIdLst>
-    <p:handoutMasterId r:id="rId134"/>
+    <p:handoutMasterId r:id="rId133"/>
   </p:handoutMasterIdLst>
   <p:sldIdLst>
     <p:sldId id="257" r:id="rId2"/>
@@ -78,99 +78,98 @@
     <p:sldId id="270" r:id="rId66"/>
     <p:sldId id="271" r:id="rId67"/>
     <p:sldId id="272" r:id="rId68"/>
-    <p:sldId id="273" r:id="rId69"/>
-    <p:sldId id="274" r:id="rId70"/>
-    <p:sldId id="275" r:id="rId71"/>
-    <p:sldId id="276" r:id="rId72"/>
-    <p:sldId id="277" r:id="rId73"/>
-    <p:sldId id="278" r:id="rId74"/>
-    <p:sldId id="279" r:id="rId75"/>
-    <p:sldId id="280" r:id="rId76"/>
-    <p:sldId id="281" r:id="rId77"/>
-    <p:sldId id="282" r:id="rId78"/>
-    <p:sldId id="283" r:id="rId79"/>
-    <p:sldId id="284" r:id="rId80"/>
-    <p:sldId id="285" r:id="rId81"/>
-    <p:sldId id="287" r:id="rId82"/>
-    <p:sldId id="288" r:id="rId83"/>
-    <p:sldId id="286" r:id="rId84"/>
-    <p:sldId id="289" r:id="rId85"/>
-    <p:sldId id="290" r:id="rId86"/>
-    <p:sldId id="291" r:id="rId87"/>
-    <p:sldId id="292" r:id="rId88"/>
-    <p:sldId id="293" r:id="rId89"/>
-    <p:sldId id="294" r:id="rId90"/>
-    <p:sldId id="295" r:id="rId91"/>
-    <p:sldId id="296" r:id="rId92"/>
-    <p:sldId id="297" r:id="rId93"/>
-    <p:sldId id="298" r:id="rId94"/>
-    <p:sldId id="299" r:id="rId95"/>
-    <p:sldId id="300" r:id="rId96"/>
-    <p:sldId id="301" r:id="rId97"/>
-    <p:sldId id="302" r:id="rId98"/>
-    <p:sldId id="303" r:id="rId99"/>
-    <p:sldId id="304" r:id="rId100"/>
-    <p:sldId id="305" r:id="rId101"/>
-    <p:sldId id="306" r:id="rId102"/>
-    <p:sldId id="307" r:id="rId103"/>
-    <p:sldId id="308" r:id="rId104"/>
-    <p:sldId id="309" r:id="rId105"/>
-    <p:sldId id="310" r:id="rId106"/>
-    <p:sldId id="311" r:id="rId107"/>
-    <p:sldId id="312" r:id="rId108"/>
-    <p:sldId id="313" r:id="rId109"/>
-    <p:sldId id="314" r:id="rId110"/>
-    <p:sldId id="315" r:id="rId111"/>
-    <p:sldId id="316" r:id="rId112"/>
-    <p:sldId id="907" r:id="rId113"/>
-    <p:sldId id="319" r:id="rId114"/>
-    <p:sldId id="321" r:id="rId115"/>
-    <p:sldId id="322" r:id="rId116"/>
-    <p:sldId id="320" r:id="rId117"/>
-    <p:sldId id="323" r:id="rId118"/>
-    <p:sldId id="324" r:id="rId119"/>
-    <p:sldId id="325" r:id="rId120"/>
-    <p:sldId id="326" r:id="rId121"/>
-    <p:sldId id="386" r:id="rId122"/>
-    <p:sldId id="327" r:id="rId123"/>
-    <p:sldId id="328" r:id="rId124"/>
-    <p:sldId id="329" r:id="rId125"/>
-    <p:sldId id="330" r:id="rId126"/>
-    <p:sldId id="331" r:id="rId127"/>
-    <p:sldId id="332" r:id="rId128"/>
-    <p:sldId id="333" r:id="rId129"/>
-    <p:sldId id="334" r:id="rId130"/>
-    <p:sldId id="335" r:id="rId131"/>
-    <p:sldId id="336" r:id="rId132"/>
+    <p:sldId id="274" r:id="rId69"/>
+    <p:sldId id="275" r:id="rId70"/>
+    <p:sldId id="276" r:id="rId71"/>
+    <p:sldId id="277" r:id="rId72"/>
+    <p:sldId id="278" r:id="rId73"/>
+    <p:sldId id="279" r:id="rId74"/>
+    <p:sldId id="280" r:id="rId75"/>
+    <p:sldId id="281" r:id="rId76"/>
+    <p:sldId id="282" r:id="rId77"/>
+    <p:sldId id="283" r:id="rId78"/>
+    <p:sldId id="284" r:id="rId79"/>
+    <p:sldId id="285" r:id="rId80"/>
+    <p:sldId id="287" r:id="rId81"/>
+    <p:sldId id="288" r:id="rId82"/>
+    <p:sldId id="286" r:id="rId83"/>
+    <p:sldId id="289" r:id="rId84"/>
+    <p:sldId id="290" r:id="rId85"/>
+    <p:sldId id="291" r:id="rId86"/>
+    <p:sldId id="292" r:id="rId87"/>
+    <p:sldId id="293" r:id="rId88"/>
+    <p:sldId id="294" r:id="rId89"/>
+    <p:sldId id="295" r:id="rId90"/>
+    <p:sldId id="296" r:id="rId91"/>
+    <p:sldId id="297" r:id="rId92"/>
+    <p:sldId id="298" r:id="rId93"/>
+    <p:sldId id="299" r:id="rId94"/>
+    <p:sldId id="300" r:id="rId95"/>
+    <p:sldId id="301" r:id="rId96"/>
+    <p:sldId id="302" r:id="rId97"/>
+    <p:sldId id="303" r:id="rId98"/>
+    <p:sldId id="304" r:id="rId99"/>
+    <p:sldId id="305" r:id="rId100"/>
+    <p:sldId id="306" r:id="rId101"/>
+    <p:sldId id="307" r:id="rId102"/>
+    <p:sldId id="308" r:id="rId103"/>
+    <p:sldId id="309" r:id="rId104"/>
+    <p:sldId id="310" r:id="rId105"/>
+    <p:sldId id="311" r:id="rId106"/>
+    <p:sldId id="312" r:id="rId107"/>
+    <p:sldId id="313" r:id="rId108"/>
+    <p:sldId id="314" r:id="rId109"/>
+    <p:sldId id="315" r:id="rId110"/>
+    <p:sldId id="316" r:id="rId111"/>
+    <p:sldId id="907" r:id="rId112"/>
+    <p:sldId id="319" r:id="rId113"/>
+    <p:sldId id="321" r:id="rId114"/>
+    <p:sldId id="322" r:id="rId115"/>
+    <p:sldId id="320" r:id="rId116"/>
+    <p:sldId id="323" r:id="rId117"/>
+    <p:sldId id="324" r:id="rId118"/>
+    <p:sldId id="325" r:id="rId119"/>
+    <p:sldId id="326" r:id="rId120"/>
+    <p:sldId id="386" r:id="rId121"/>
+    <p:sldId id="327" r:id="rId122"/>
+    <p:sldId id="328" r:id="rId123"/>
+    <p:sldId id="329" r:id="rId124"/>
+    <p:sldId id="330" r:id="rId125"/>
+    <p:sldId id="331" r:id="rId126"/>
+    <p:sldId id="332" r:id="rId127"/>
+    <p:sldId id="333" r:id="rId128"/>
+    <p:sldId id="334" r:id="rId129"/>
+    <p:sldId id="335" r:id="rId130"/>
+    <p:sldId id="336" r:id="rId131"/>
   </p:sldIdLst>
   <p:sldSz cx="9144000" cy="5143500" type="screen16x9"/>
   <p:notesSz cx="6858000" cy="9144000"/>
   <p:embeddedFontLst>
     <p:embeddedFont>
       <p:font typeface="APL385 Unicode" panose="020B0709000202000203" pitchFamily="49" charset="0"/>
+      <p:regular r:id="rId134"/>
+    </p:embeddedFont>
+    <p:embeddedFont>
+      <p:font typeface="Cambria Math" panose="02040503050406030204" pitchFamily="18" charset="0"/>
       <p:regular r:id="rId135"/>
     </p:embeddedFont>
     <p:embeddedFont>
-      <p:font typeface="Cambria Math" panose="02040503050406030204" pitchFamily="18" charset="0"/>
+      <p:font typeface="Sarabun" panose="00000500000000000000" pitchFamily="2" charset="-34"/>
       <p:regular r:id="rId136"/>
-    </p:embeddedFont>
-    <p:embeddedFont>
-      <p:font typeface="Sarabun" panose="00000500000000000000" pitchFamily="2" charset="-34"/>
-      <p:regular r:id="rId137"/>
-      <p:bold r:id="rId138"/>
-      <p:italic r:id="rId139"/>
-      <p:boldItalic r:id="rId140"/>
+      <p:bold r:id="rId137"/>
+      <p:italic r:id="rId138"/>
+      <p:boldItalic r:id="rId139"/>
     </p:embeddedFont>
     <p:embeddedFont>
       <p:font typeface="Times" panose="02020603050405020304" pitchFamily="18" charset="0"/>
-      <p:regular r:id="rId141"/>
-      <p:bold r:id="rId142"/>
-      <p:italic r:id="rId143"/>
-      <p:boldItalic r:id="rId144"/>
+      <p:regular r:id="rId140"/>
+      <p:bold r:id="rId141"/>
+      <p:italic r:id="rId142"/>
+      <p:boldItalic r:id="rId143"/>
     </p:embeddedFont>
     <p:embeddedFont>
       <p:font typeface="Wingdings 2" panose="05020102010507070707" pitchFamily="18" charset="2"/>
-      <p:regular r:id="rId145"/>
+      <p:regular r:id="rId144"/>
     </p:embeddedFont>
   </p:embeddedFontLst>
   <p:defaultTextStyle>
@@ -387,7 +386,7 @@
               <a:rPr lang="en-GB" smtClean="0">
                 <a:latin typeface="Sarabun" panose="00000500000000000000" pitchFamily="2" charset="-34"/>
               </a:rPr>
-              <a:t>10/08/2025</a:t>
+              <a:t>15/08/2025</a:t>
             </a:fld>
             <a:endParaRPr lang="en-GB" dirty="0">
               <a:latin typeface="Sarabun" panose="00000500000000000000" pitchFamily="2" charset="-34"/>
@@ -565,7 +564,7 @@
             <a:fld id="{CDEAEF8A-5BB8-41C8-B8C2-160617C17EF4}" type="datetimeFigureOut">
               <a:rPr lang="en-GB" smtClean="0"/>
               <a:pPr/>
-              <a:t>10/08/2025</a:t>
+              <a:t>15/08/2025</a:t>
             </a:fld>
             <a:endParaRPr lang="en-GB" dirty="0"/>
           </a:p>
@@ -1219,7 +1218,7 @@
             <a:fld id="{4320660A-27FD-4528-AE7F-EC6080404EEB}" type="slidenum">
               <a:rPr lang="en-GB" smtClean="0"/>
               <a:pPr/>
-              <a:t>105</a:t>
+              <a:t>104</a:t>
             </a:fld>
             <a:endParaRPr lang="en-GB" dirty="0"/>
           </a:p>
@@ -4776,216 +4775,6 @@
 </file>
 
 <file path=ppt/slides/slide100.xml><?xml version="1.0" encoding="utf-8"?>
-<p:sld xmlns:a="http://schemas.openxmlformats.org/drawingml/2006/main" xmlns:r="http://schemas.openxmlformats.org/officeDocument/2006/relationships" xmlns:p="http://schemas.openxmlformats.org/presentationml/2006/main">
-  <p:cSld>
-    <p:spTree>
-      <p:nvGrpSpPr>
-        <p:cNvPr id="1" name=""/>
-        <p:cNvGrpSpPr/>
-        <p:nvPr/>
-      </p:nvGrpSpPr>
-      <p:grpSpPr>
-        <a:xfrm>
-          <a:off x="0" y="0"/>
-          <a:ext cx="0" cy="0"/>
-          <a:chOff x="0" y="0"/>
-          <a:chExt cx="0" cy="0"/>
-        </a:xfrm>
-      </p:grpSpPr>
-      <p:sp>
-        <p:nvSpPr>
-          <p:cNvPr id="2" name="Content Placeholder 1">
-            <a:extLst>
-              <a:ext uri="{FF2B5EF4-FFF2-40B4-BE49-F238E27FC236}">
-                <a16:creationId xmlns:a16="http://schemas.microsoft.com/office/drawing/2014/main" id="{BEC7A5DF-6C8B-A621-C3FB-7F787F004486}"/>
-              </a:ext>
-            </a:extLst>
-          </p:cNvPr>
-          <p:cNvSpPr>
-            <a:spLocks noGrp="1"/>
-          </p:cNvSpPr>
-          <p:nvPr>
-            <p:ph idx="1"/>
-          </p:nvPr>
-        </p:nvSpPr>
-        <p:spPr/>
-        <p:txBody>
-          <a:bodyPr/>
-          <a:lstStyle/>
-          <a:p>
-            <a:pPr marL="0" indent="0">
-              <a:buNone/>
-            </a:pPr>
-            <a:r>
-              <a:rPr lang="en-GB" dirty="0">
-                <a:solidFill>
-                  <a:schemeClr val="tx1"/>
-                </a:solidFill>
-                <a:latin typeface="Arial" charset="0"/>
-                <a:cs typeface="Arial" charset="0"/>
-              </a:rPr>
-              <a:t>This function provides an access to DLLs and external routines in the OS.</a:t>
-            </a:r>
-          </a:p>
-          <a:p>
-            <a:pPr marL="0" indent="0">
-              <a:buNone/>
-            </a:pPr>
-            <a:r>
-              <a:rPr lang="en-GB" sz="2100" dirty="0">
-                <a:solidFill>
-                  <a:schemeClr val="accent3">
-                    <a:lumMod val="50000"/>
-                  </a:schemeClr>
-                </a:solidFill>
-                <a:latin typeface="APL385 Unicode" panose="020B0709000202000203" pitchFamily="49" charset="0"/>
-                <a:cs typeface="Arial" charset="0"/>
-              </a:rPr>
-              <a:t>	</a:t>
-            </a:r>
-            <a:r>
-              <a:rPr lang="en-GB" sz="2100" dirty="0">
-                <a:solidFill>
-                  <a:srgbClr val="00B050"/>
-                </a:solidFill>
-                <a:latin typeface="APL385 Unicode" panose="020B0709000202000203" pitchFamily="49" charset="0"/>
-              </a:rPr>
-              <a:t>'div' ⎕NA 'F8 </a:t>
-            </a:r>
-            <a:r>
-              <a:rPr lang="en-GB" sz="2100" dirty="0" err="1">
-                <a:solidFill>
-                  <a:srgbClr val="00B050"/>
-                </a:solidFill>
-                <a:latin typeface="APL385 Unicode" panose="020B0709000202000203" pitchFamily="49" charset="0"/>
-              </a:rPr>
-              <a:t>math|divide</a:t>
-            </a:r>
-            <a:r>
-              <a:rPr lang="en-GB" sz="2100" dirty="0">
-                <a:solidFill>
-                  <a:srgbClr val="00B050"/>
-                </a:solidFill>
-                <a:latin typeface="APL385 Unicode" panose="020B0709000202000203" pitchFamily="49" charset="0"/>
-              </a:rPr>
-              <a:t> I4 </a:t>
-            </a:r>
-            <a:r>
-              <a:rPr lang="en-GB" sz="2100" dirty="0" err="1">
-                <a:solidFill>
-                  <a:srgbClr val="00B050"/>
-                </a:solidFill>
-                <a:latin typeface="APL385 Unicode" panose="020B0709000202000203" pitchFamily="49" charset="0"/>
-              </a:rPr>
-              <a:t>I4</a:t>
-            </a:r>
-            <a:r>
-              <a:rPr lang="en-GB" sz="2100" dirty="0">
-                <a:solidFill>
-                  <a:srgbClr val="00B050"/>
-                </a:solidFill>
-                <a:latin typeface="APL385 Unicode" panose="020B0709000202000203" pitchFamily="49" charset="0"/>
-              </a:rPr>
-              <a:t>'</a:t>
-            </a:r>
-          </a:p>
-          <a:p>
-            <a:pPr marL="0" indent="0">
-              <a:buNone/>
-            </a:pPr>
-            <a:endParaRPr lang="en-GB" dirty="0"/>
-          </a:p>
-          <a:p>
-            <a:pPr marL="0" indent="0">
-              <a:buNone/>
-            </a:pPr>
-            <a:r>
-              <a:rPr lang="en-GB" dirty="0"/>
-              <a:t>The "C FFI" for Dyalog</a:t>
-            </a:r>
-          </a:p>
-        </p:txBody>
-      </p:sp>
-      <p:sp>
-        <p:nvSpPr>
-          <p:cNvPr id="3" name="Title 2">
-            <a:extLst>
-              <a:ext uri="{FF2B5EF4-FFF2-40B4-BE49-F238E27FC236}">
-                <a16:creationId xmlns:a16="http://schemas.microsoft.com/office/drawing/2014/main" id="{3276318F-1B4D-3EE9-008D-87C23877481B}"/>
-              </a:ext>
-            </a:extLst>
-          </p:cNvPr>
-          <p:cNvSpPr>
-            <a:spLocks noGrp="1"/>
-          </p:cNvSpPr>
-          <p:nvPr>
-            <p:ph type="title"/>
-          </p:nvPr>
-        </p:nvSpPr>
-        <p:spPr/>
-        <p:txBody>
-          <a:bodyPr/>
-          <a:lstStyle/>
-          <a:p>
-            <a:r>
-              <a:rPr lang="en-GB" dirty="0"/>
-              <a:t>Name Association (</a:t>
-            </a:r>
-            <a:r>
-              <a:rPr lang="en-GB" dirty="0">
-                <a:solidFill>
-                  <a:srgbClr val="FF6600"/>
-                </a:solidFill>
-                <a:latin typeface="APL385 Unicode" panose="020B0709000202000203" pitchFamily="49" charset="0"/>
-              </a:rPr>
-              <a:t>⎕NA</a:t>
-            </a:r>
-            <a:r>
-              <a:rPr lang="en-GB" dirty="0"/>
-              <a:t>)</a:t>
-            </a:r>
-          </a:p>
-        </p:txBody>
-      </p:sp>
-      <p:sp>
-        <p:nvSpPr>
-          <p:cNvPr id="4" name="Media Placeholder 3">
-            <a:extLst>
-              <a:ext uri="{FF2B5EF4-FFF2-40B4-BE49-F238E27FC236}">
-                <a16:creationId xmlns:a16="http://schemas.microsoft.com/office/drawing/2014/main" id="{BE650FD4-34B1-647F-7AAC-4249730B1FC0}"/>
-              </a:ext>
-            </a:extLst>
-          </p:cNvPr>
-          <p:cNvSpPr>
-            <a:spLocks noGrp="1"/>
-          </p:cNvSpPr>
-          <p:nvPr>
-            <p:ph type="media" sz="quarter" idx="11"/>
-          </p:nvPr>
-        </p:nvSpPr>
-        <p:spPr/>
-        <p:txBody>
-          <a:bodyPr/>
-          <a:lstStyle/>
-          <a:p>
-            <a:endParaRPr lang="en-GB"/>
-          </a:p>
-        </p:txBody>
-      </p:sp>
-    </p:spTree>
-    <p:extLst>
-      <p:ext uri="{BB962C8B-B14F-4D97-AF65-F5344CB8AC3E}">
-        <p14:creationId xmlns:p14="http://schemas.microsoft.com/office/powerpoint/2010/main" val="215498922"/>
-      </p:ext>
-    </p:extLst>
-  </p:cSld>
-  <p:clrMapOvr>
-    <a:masterClrMapping/>
-  </p:clrMapOvr>
-</p:sld>
-</file>
-
-<file path=ppt/slides/slide101.xml><?xml version="1.0" encoding="utf-8"?>
 <p:sld xmlns:a="http://schemas.openxmlformats.org/drawingml/2006/main" xmlns:r="http://schemas.openxmlformats.org/officeDocument/2006/relationships" xmlns:p="http://schemas.openxmlformats.org/presentationml/2006/main">
   <p:cSld>
     <p:spTree>
@@ -6334,7 +6123,7 @@
 </p:sld>
 </file>
 
-<file path=ppt/slides/slide102.xml><?xml version="1.0" encoding="utf-8"?>
+<file path=ppt/slides/slide101.xml><?xml version="1.0" encoding="utf-8"?>
 <p:sld xmlns:a="http://schemas.openxmlformats.org/drawingml/2006/main" xmlns:r="http://schemas.openxmlformats.org/officeDocument/2006/relationships" xmlns:p="http://schemas.openxmlformats.org/presentationml/2006/main">
   <p:cSld>
     <p:spTree>
@@ -6904,7 +6693,7 @@
 </p:sld>
 </file>
 
-<file path=ppt/slides/slide103.xml><?xml version="1.0" encoding="utf-8"?>
+<file path=ppt/slides/slide102.xml><?xml version="1.0" encoding="utf-8"?>
 <p:sld xmlns:a="http://schemas.openxmlformats.org/drawingml/2006/main" xmlns:r="http://schemas.openxmlformats.org/officeDocument/2006/relationships" xmlns:p="http://schemas.openxmlformats.org/presentationml/2006/main">
   <p:cSld>
     <p:spTree>
@@ -7091,7 +6880,7 @@
 </p:sld>
 </file>
 
-<file path=ppt/slides/slide104.xml><?xml version="1.0" encoding="utf-8"?>
+<file path=ppt/slides/slide103.xml><?xml version="1.0" encoding="utf-8"?>
 <p:sld xmlns:a="http://schemas.openxmlformats.org/drawingml/2006/main" xmlns:r="http://schemas.openxmlformats.org/officeDocument/2006/relationships" xmlns:p="http://schemas.openxmlformats.org/presentationml/2006/main">
   <p:cSld>
     <p:spTree>
@@ -7450,7 +7239,7 @@
 </p:sld>
 </file>
 
-<file path=ppt/slides/slide105.xml><?xml version="1.0" encoding="utf-8"?>
+<file path=ppt/slides/slide104.xml><?xml version="1.0" encoding="utf-8"?>
 <p:sld xmlns:a="http://schemas.openxmlformats.org/drawingml/2006/main" xmlns:r="http://schemas.openxmlformats.org/officeDocument/2006/relationships" xmlns:p="http://schemas.openxmlformats.org/presentationml/2006/main">
   <p:cSld>
     <p:spTree>
@@ -7687,7 +7476,7 @@
 </p:sld>
 </file>
 
-<file path=ppt/slides/slide106.xml><?xml version="1.0" encoding="utf-8"?>
+<file path=ppt/slides/slide105.xml><?xml version="1.0" encoding="utf-8"?>
 <p:sld xmlns:a="http://schemas.openxmlformats.org/drawingml/2006/main" xmlns:r="http://schemas.openxmlformats.org/officeDocument/2006/relationships" xmlns:p="http://schemas.openxmlformats.org/presentationml/2006/main">
   <p:cSld>
     <p:spTree>
@@ -8036,7 +7825,7 @@
 </p:sld>
 </file>
 
-<file path=ppt/slides/slide107.xml><?xml version="1.0" encoding="utf-8"?>
+<file path=ppt/slides/slide106.xml><?xml version="1.0" encoding="utf-8"?>
 <p:sld xmlns:a="http://schemas.openxmlformats.org/drawingml/2006/main" xmlns:r="http://schemas.openxmlformats.org/officeDocument/2006/relationships" xmlns:p="http://schemas.openxmlformats.org/presentationml/2006/main" show="0">
   <p:cSld>
     <p:spTree>
@@ -8190,7 +7979,7 @@
 </p:sld>
 </file>
 
-<file path=ppt/slides/slide108.xml><?xml version="1.0" encoding="utf-8"?>
+<file path=ppt/slides/slide107.xml><?xml version="1.0" encoding="utf-8"?>
 <p:sld xmlns:a="http://schemas.openxmlformats.org/drawingml/2006/main" xmlns:r="http://schemas.openxmlformats.org/officeDocument/2006/relationships" xmlns:p="http://schemas.openxmlformats.org/presentationml/2006/main">
   <p:cSld>
     <p:spTree>
@@ -8334,7 +8123,7 @@
 </p:sld>
 </file>
 
-<file path=ppt/slides/slide109.xml><?xml version="1.0" encoding="utf-8"?>
+<file path=ppt/slides/slide108.xml><?xml version="1.0" encoding="utf-8"?>
 <p:sld xmlns:a="http://schemas.openxmlformats.org/drawingml/2006/main" xmlns:r="http://schemas.openxmlformats.org/officeDocument/2006/relationships" xmlns:p="http://schemas.openxmlformats.org/presentationml/2006/main">
   <p:cSld>
     <p:spTree>
@@ -8459,6 +8248,271 @@
     <p:extLst>
       <p:ext uri="{BB962C8B-B14F-4D97-AF65-F5344CB8AC3E}">
         <p14:creationId xmlns:p14="http://schemas.microsoft.com/office/powerpoint/2010/main" val="38933434"/>
+      </p:ext>
+    </p:extLst>
+  </p:cSld>
+  <p:clrMapOvr>
+    <a:masterClrMapping/>
+  </p:clrMapOvr>
+</p:sld>
+</file>
+
+<file path=ppt/slides/slide109.xml><?xml version="1.0" encoding="utf-8"?>
+<p:sld xmlns:a="http://schemas.openxmlformats.org/drawingml/2006/main" xmlns:r="http://schemas.openxmlformats.org/officeDocument/2006/relationships" xmlns:p="http://schemas.openxmlformats.org/presentationml/2006/main">
+  <p:cSld>
+    <p:spTree>
+      <p:nvGrpSpPr>
+        <p:cNvPr id="1" name=""/>
+        <p:cNvGrpSpPr/>
+        <p:nvPr/>
+      </p:nvGrpSpPr>
+      <p:grpSpPr>
+        <a:xfrm>
+          <a:off x="0" y="0"/>
+          <a:ext cx="0" cy="0"/>
+          <a:chOff x="0" y="0"/>
+          <a:chExt cx="0" cy="0"/>
+        </a:xfrm>
+      </p:grpSpPr>
+      <p:sp>
+        <p:nvSpPr>
+          <p:cNvPr id="2" name="Content Placeholder 1">
+            <a:extLst>
+              <a:ext uri="{FF2B5EF4-FFF2-40B4-BE49-F238E27FC236}">
+                <a16:creationId xmlns:a16="http://schemas.microsoft.com/office/drawing/2014/main" id="{B72B4795-5958-1DF5-84FC-C2547512F55F}"/>
+              </a:ext>
+            </a:extLst>
+          </p:cNvPr>
+          <p:cNvSpPr>
+            <a:spLocks noGrp="1"/>
+          </p:cNvSpPr>
+          <p:nvPr>
+            <p:ph idx="1"/>
+          </p:nvPr>
+        </p:nvSpPr>
+        <p:spPr/>
+        <p:txBody>
+          <a:bodyPr>
+            <a:normAutofit fontScale="92500" lnSpcReduction="10000"/>
+          </a:bodyPr>
+          <a:lstStyle/>
+          <a:p>
+            <a:pPr marL="0" indent="0">
+              <a:buNone/>
+            </a:pPr>
+            <a:r>
+              <a:rPr lang="en-GB" dirty="0"/>
+              <a:t>This function allows to create namespaces and copy names between them.</a:t>
+            </a:r>
+          </a:p>
+          <a:p>
+            <a:pPr marL="0" indent="0">
+              <a:buNone/>
+            </a:pPr>
+            <a:r>
+              <a:rPr lang="en-GB" dirty="0">
+                <a:solidFill>
+                  <a:schemeClr val="accent6">
+                    <a:lumMod val="50000"/>
+                  </a:schemeClr>
+                </a:solidFill>
+              </a:rPr>
+              <a:t>Dyadic form creates a namespace with a name.</a:t>
+            </a:r>
+          </a:p>
+          <a:p>
+            <a:pPr marL="0" indent="0">
+              <a:buNone/>
+            </a:pPr>
+            <a:r>
+              <a:rPr lang="en-GB" dirty="0">
+                <a:solidFill>
+                  <a:schemeClr val="accent6">
+                    <a:lumMod val="50000"/>
+                  </a:schemeClr>
+                </a:solidFill>
+                <a:latin typeface="APL385 Unicode" panose="020B0709000202000203" pitchFamily="49" charset="0"/>
+              </a:rPr>
+              <a:t>	</a:t>
+            </a:r>
+            <a:r>
+              <a:rPr lang="en-GB" dirty="0">
+                <a:solidFill>
+                  <a:srgbClr val="00B050"/>
+                </a:solidFill>
+                <a:latin typeface="APL385 Unicode" panose="020B0709000202000203" pitchFamily="49" charset="0"/>
+              </a:rPr>
+              <a:t>'</a:t>
+            </a:r>
+            <a:r>
+              <a:rPr lang="en-GB" dirty="0" err="1">
+                <a:solidFill>
+                  <a:srgbClr val="00B050"/>
+                </a:solidFill>
+                <a:latin typeface="APL385 Unicode" panose="020B0709000202000203" pitchFamily="49" charset="0"/>
+              </a:rPr>
+              <a:t>myNs</a:t>
+            </a:r>
+            <a:r>
+              <a:rPr lang="en-GB" dirty="0">
+                <a:solidFill>
+                  <a:srgbClr val="00B050"/>
+                </a:solidFill>
+                <a:latin typeface="APL385 Unicode" panose="020B0709000202000203" pitchFamily="49" charset="0"/>
+              </a:rPr>
+              <a:t>' ⎕ns ''</a:t>
+            </a:r>
+          </a:p>
+          <a:p>
+            <a:pPr marL="0" indent="0">
+              <a:buNone/>
+            </a:pPr>
+            <a:r>
+              <a:rPr lang="en-GB" dirty="0">
+                <a:solidFill>
+                  <a:schemeClr val="accent6">
+                    <a:lumMod val="50000"/>
+                  </a:schemeClr>
+                </a:solidFill>
+              </a:rPr>
+              <a:t>Monadic creates a nameless namespace:</a:t>
+            </a:r>
+          </a:p>
+          <a:p>
+            <a:pPr marL="0" indent="0">
+              <a:buNone/>
+            </a:pPr>
+            <a:r>
+              <a:rPr lang="en-GB" dirty="0">
+                <a:solidFill>
+                  <a:schemeClr val="accent6">
+                    <a:lumMod val="50000"/>
+                  </a:schemeClr>
+                </a:solidFill>
+                <a:latin typeface="APL385 Unicode" panose="020B0709000202000203" pitchFamily="49" charset="0"/>
+              </a:rPr>
+              <a:t>	</a:t>
+            </a:r>
+            <a:r>
+              <a:rPr lang="en-GB" dirty="0">
+                <a:solidFill>
+                  <a:srgbClr val="00B050"/>
+                </a:solidFill>
+                <a:latin typeface="APL385 Unicode" panose="020B0709000202000203" pitchFamily="49" charset="0"/>
+              </a:rPr>
+              <a:t>+</a:t>
+            </a:r>
+            <a:r>
+              <a:rPr lang="en-GB" dirty="0" err="1">
+                <a:solidFill>
+                  <a:srgbClr val="00B050"/>
+                </a:solidFill>
+                <a:latin typeface="APL385 Unicode" panose="020B0709000202000203" pitchFamily="49" charset="0"/>
+              </a:rPr>
+              <a:t>mn</a:t>
+            </a:r>
+            <a:r>
+              <a:rPr lang="en-GB" dirty="0">
+                <a:solidFill>
+                  <a:srgbClr val="00B050"/>
+                </a:solidFill>
+                <a:latin typeface="APL385 Unicode" panose="020B0709000202000203" pitchFamily="49" charset="0"/>
+              </a:rPr>
+              <a:t>←⎕ns ''</a:t>
+            </a:r>
+          </a:p>
+          <a:p>
+            <a:pPr marL="0" indent="0">
+              <a:buNone/>
+            </a:pPr>
+            <a:r>
+              <a:rPr lang="en-GB" dirty="0">
+                <a:solidFill>
+                  <a:schemeClr val="accent3">
+                    <a:lumMod val="50000"/>
+                  </a:schemeClr>
+                </a:solidFill>
+                <a:latin typeface="APL385 Unicode" panose="020B0709000202000203" pitchFamily="49" charset="0"/>
+              </a:rPr>
+              <a:t>#.[Namespace]</a:t>
+            </a:r>
+          </a:p>
+        </p:txBody>
+      </p:sp>
+      <p:sp>
+        <p:nvSpPr>
+          <p:cNvPr id="3" name="Title 2">
+            <a:extLst>
+              <a:ext uri="{FF2B5EF4-FFF2-40B4-BE49-F238E27FC236}">
+                <a16:creationId xmlns:a16="http://schemas.microsoft.com/office/drawing/2014/main" id="{9ED6F1A6-D9BE-826C-8C5B-6FF79211E591}"/>
+              </a:ext>
+            </a:extLst>
+          </p:cNvPr>
+          <p:cNvSpPr>
+            <a:spLocks noGrp="1"/>
+          </p:cNvSpPr>
+          <p:nvPr>
+            <p:ph type="title"/>
+          </p:nvPr>
+        </p:nvSpPr>
+        <p:spPr/>
+        <p:txBody>
+          <a:bodyPr/>
+          <a:lstStyle/>
+          <a:p>
+            <a:r>
+              <a:rPr lang="en-GB" dirty="0" err="1"/>
+              <a:t>NameSpace</a:t>
+            </a:r>
+            <a:r>
+              <a:rPr lang="en-GB" dirty="0"/>
+              <a:t> (</a:t>
+            </a:r>
+            <a:r>
+              <a:rPr lang="en-GB" dirty="0">
+                <a:solidFill>
+                  <a:srgbClr val="FF6600"/>
+                </a:solidFill>
+                <a:latin typeface="APL385 Unicode" panose="020B0709000202000203" pitchFamily="49" charset="0"/>
+              </a:rPr>
+              <a:t>⎕NS</a:t>
+            </a:r>
+            <a:r>
+              <a:rPr lang="en-GB" dirty="0"/>
+              <a:t>)</a:t>
+            </a:r>
+          </a:p>
+        </p:txBody>
+      </p:sp>
+      <p:sp>
+        <p:nvSpPr>
+          <p:cNvPr id="4" name="Media Placeholder 3">
+            <a:extLst>
+              <a:ext uri="{FF2B5EF4-FFF2-40B4-BE49-F238E27FC236}">
+                <a16:creationId xmlns:a16="http://schemas.microsoft.com/office/drawing/2014/main" id="{DF7CE215-5F61-8E8D-F794-2EF9CAEACEB4}"/>
+              </a:ext>
+            </a:extLst>
+          </p:cNvPr>
+          <p:cNvSpPr>
+            <a:spLocks noGrp="1"/>
+          </p:cNvSpPr>
+          <p:nvPr>
+            <p:ph type="media" sz="quarter" idx="11"/>
+          </p:nvPr>
+        </p:nvSpPr>
+        <p:spPr/>
+        <p:txBody>
+          <a:bodyPr/>
+          <a:lstStyle/>
+          <a:p>
+            <a:endParaRPr lang="en-GB"/>
+          </a:p>
+        </p:txBody>
+      </p:sp>
+    </p:spTree>
+    <p:extLst>
+      <p:ext uri="{BB962C8B-B14F-4D97-AF65-F5344CB8AC3E}">
+        <p14:creationId xmlns:p14="http://schemas.microsoft.com/office/powerpoint/2010/main" val="2449210132"/>
       </p:ext>
     </p:extLst>
   </p:cSld>
@@ -8606,271 +8660,6 @@
   <p:cSld>
     <p:spTree>
       <p:nvGrpSpPr>
-        <p:cNvPr id="1" name=""/>
-        <p:cNvGrpSpPr/>
-        <p:nvPr/>
-      </p:nvGrpSpPr>
-      <p:grpSpPr>
-        <a:xfrm>
-          <a:off x="0" y="0"/>
-          <a:ext cx="0" cy="0"/>
-          <a:chOff x="0" y="0"/>
-          <a:chExt cx="0" cy="0"/>
-        </a:xfrm>
-      </p:grpSpPr>
-      <p:sp>
-        <p:nvSpPr>
-          <p:cNvPr id="2" name="Content Placeholder 1">
-            <a:extLst>
-              <a:ext uri="{FF2B5EF4-FFF2-40B4-BE49-F238E27FC236}">
-                <a16:creationId xmlns:a16="http://schemas.microsoft.com/office/drawing/2014/main" id="{B72B4795-5958-1DF5-84FC-C2547512F55F}"/>
-              </a:ext>
-            </a:extLst>
-          </p:cNvPr>
-          <p:cNvSpPr>
-            <a:spLocks noGrp="1"/>
-          </p:cNvSpPr>
-          <p:nvPr>
-            <p:ph idx="1"/>
-          </p:nvPr>
-        </p:nvSpPr>
-        <p:spPr/>
-        <p:txBody>
-          <a:bodyPr>
-            <a:normAutofit fontScale="92500" lnSpcReduction="10000"/>
-          </a:bodyPr>
-          <a:lstStyle/>
-          <a:p>
-            <a:pPr marL="0" indent="0">
-              <a:buNone/>
-            </a:pPr>
-            <a:r>
-              <a:rPr lang="en-GB" dirty="0"/>
-              <a:t>This function allows to create namespaces and copy names between them.</a:t>
-            </a:r>
-          </a:p>
-          <a:p>
-            <a:pPr marL="0" indent="0">
-              <a:buNone/>
-            </a:pPr>
-            <a:r>
-              <a:rPr lang="en-GB" dirty="0">
-                <a:solidFill>
-                  <a:schemeClr val="accent6">
-                    <a:lumMod val="50000"/>
-                  </a:schemeClr>
-                </a:solidFill>
-              </a:rPr>
-              <a:t>Dyadic form creates a namespace with a name.</a:t>
-            </a:r>
-          </a:p>
-          <a:p>
-            <a:pPr marL="0" indent="0">
-              <a:buNone/>
-            </a:pPr>
-            <a:r>
-              <a:rPr lang="en-GB" dirty="0">
-                <a:solidFill>
-                  <a:schemeClr val="accent6">
-                    <a:lumMod val="50000"/>
-                  </a:schemeClr>
-                </a:solidFill>
-                <a:latin typeface="APL385 Unicode" panose="020B0709000202000203" pitchFamily="49" charset="0"/>
-              </a:rPr>
-              <a:t>	</a:t>
-            </a:r>
-            <a:r>
-              <a:rPr lang="en-GB" dirty="0">
-                <a:solidFill>
-                  <a:srgbClr val="00B050"/>
-                </a:solidFill>
-                <a:latin typeface="APL385 Unicode" panose="020B0709000202000203" pitchFamily="49" charset="0"/>
-              </a:rPr>
-              <a:t>'</a:t>
-            </a:r>
-            <a:r>
-              <a:rPr lang="en-GB" dirty="0" err="1">
-                <a:solidFill>
-                  <a:srgbClr val="00B050"/>
-                </a:solidFill>
-                <a:latin typeface="APL385 Unicode" panose="020B0709000202000203" pitchFamily="49" charset="0"/>
-              </a:rPr>
-              <a:t>myNs</a:t>
-            </a:r>
-            <a:r>
-              <a:rPr lang="en-GB" dirty="0">
-                <a:solidFill>
-                  <a:srgbClr val="00B050"/>
-                </a:solidFill>
-                <a:latin typeface="APL385 Unicode" panose="020B0709000202000203" pitchFamily="49" charset="0"/>
-              </a:rPr>
-              <a:t>' ⎕ns ''</a:t>
-            </a:r>
-          </a:p>
-          <a:p>
-            <a:pPr marL="0" indent="0">
-              <a:buNone/>
-            </a:pPr>
-            <a:r>
-              <a:rPr lang="en-GB" dirty="0">
-                <a:solidFill>
-                  <a:schemeClr val="accent6">
-                    <a:lumMod val="50000"/>
-                  </a:schemeClr>
-                </a:solidFill>
-              </a:rPr>
-              <a:t>Monadic creates a nameless namespace:</a:t>
-            </a:r>
-          </a:p>
-          <a:p>
-            <a:pPr marL="0" indent="0">
-              <a:buNone/>
-            </a:pPr>
-            <a:r>
-              <a:rPr lang="en-GB" dirty="0">
-                <a:solidFill>
-                  <a:schemeClr val="accent6">
-                    <a:lumMod val="50000"/>
-                  </a:schemeClr>
-                </a:solidFill>
-                <a:latin typeface="APL385 Unicode" panose="020B0709000202000203" pitchFamily="49" charset="0"/>
-              </a:rPr>
-              <a:t>	</a:t>
-            </a:r>
-            <a:r>
-              <a:rPr lang="en-GB" dirty="0">
-                <a:solidFill>
-                  <a:srgbClr val="00B050"/>
-                </a:solidFill>
-                <a:latin typeface="APL385 Unicode" panose="020B0709000202000203" pitchFamily="49" charset="0"/>
-              </a:rPr>
-              <a:t>+</a:t>
-            </a:r>
-            <a:r>
-              <a:rPr lang="en-GB" dirty="0" err="1">
-                <a:solidFill>
-                  <a:srgbClr val="00B050"/>
-                </a:solidFill>
-                <a:latin typeface="APL385 Unicode" panose="020B0709000202000203" pitchFamily="49" charset="0"/>
-              </a:rPr>
-              <a:t>mn</a:t>
-            </a:r>
-            <a:r>
-              <a:rPr lang="en-GB" dirty="0">
-                <a:solidFill>
-                  <a:srgbClr val="00B050"/>
-                </a:solidFill>
-                <a:latin typeface="APL385 Unicode" panose="020B0709000202000203" pitchFamily="49" charset="0"/>
-              </a:rPr>
-              <a:t>←⎕ns ''</a:t>
-            </a:r>
-          </a:p>
-          <a:p>
-            <a:pPr marL="0" indent="0">
-              <a:buNone/>
-            </a:pPr>
-            <a:r>
-              <a:rPr lang="en-GB" dirty="0">
-                <a:solidFill>
-                  <a:schemeClr val="accent3">
-                    <a:lumMod val="50000"/>
-                  </a:schemeClr>
-                </a:solidFill>
-                <a:latin typeface="APL385 Unicode" panose="020B0709000202000203" pitchFamily="49" charset="0"/>
-              </a:rPr>
-              <a:t>#.[Namespace]</a:t>
-            </a:r>
-          </a:p>
-        </p:txBody>
-      </p:sp>
-      <p:sp>
-        <p:nvSpPr>
-          <p:cNvPr id="3" name="Title 2">
-            <a:extLst>
-              <a:ext uri="{FF2B5EF4-FFF2-40B4-BE49-F238E27FC236}">
-                <a16:creationId xmlns:a16="http://schemas.microsoft.com/office/drawing/2014/main" id="{9ED6F1A6-D9BE-826C-8C5B-6FF79211E591}"/>
-              </a:ext>
-            </a:extLst>
-          </p:cNvPr>
-          <p:cNvSpPr>
-            <a:spLocks noGrp="1"/>
-          </p:cNvSpPr>
-          <p:nvPr>
-            <p:ph type="title"/>
-          </p:nvPr>
-        </p:nvSpPr>
-        <p:spPr/>
-        <p:txBody>
-          <a:bodyPr/>
-          <a:lstStyle/>
-          <a:p>
-            <a:r>
-              <a:rPr lang="en-GB" dirty="0" err="1"/>
-              <a:t>NameSpace</a:t>
-            </a:r>
-            <a:r>
-              <a:rPr lang="en-GB" dirty="0"/>
-              <a:t> (</a:t>
-            </a:r>
-            <a:r>
-              <a:rPr lang="en-GB" dirty="0">
-                <a:solidFill>
-                  <a:srgbClr val="FF6600"/>
-                </a:solidFill>
-                <a:latin typeface="APL385 Unicode" panose="020B0709000202000203" pitchFamily="49" charset="0"/>
-              </a:rPr>
-              <a:t>⎕NS</a:t>
-            </a:r>
-            <a:r>
-              <a:rPr lang="en-GB" dirty="0"/>
-              <a:t>)</a:t>
-            </a:r>
-          </a:p>
-        </p:txBody>
-      </p:sp>
-      <p:sp>
-        <p:nvSpPr>
-          <p:cNvPr id="4" name="Media Placeholder 3">
-            <a:extLst>
-              <a:ext uri="{FF2B5EF4-FFF2-40B4-BE49-F238E27FC236}">
-                <a16:creationId xmlns:a16="http://schemas.microsoft.com/office/drawing/2014/main" id="{DF7CE215-5F61-8E8D-F794-2EF9CAEACEB4}"/>
-              </a:ext>
-            </a:extLst>
-          </p:cNvPr>
-          <p:cNvSpPr>
-            <a:spLocks noGrp="1"/>
-          </p:cNvSpPr>
-          <p:nvPr>
-            <p:ph type="media" sz="quarter" idx="11"/>
-          </p:nvPr>
-        </p:nvSpPr>
-        <p:spPr/>
-        <p:txBody>
-          <a:bodyPr/>
-          <a:lstStyle/>
-          <a:p>
-            <a:endParaRPr lang="en-GB"/>
-          </a:p>
-        </p:txBody>
-      </p:sp>
-    </p:spTree>
-    <p:extLst>
-      <p:ext uri="{BB962C8B-B14F-4D97-AF65-F5344CB8AC3E}">
-        <p14:creationId xmlns:p14="http://schemas.microsoft.com/office/powerpoint/2010/main" val="2449210132"/>
-      </p:ext>
-    </p:extLst>
-  </p:cSld>
-  <p:clrMapOvr>
-    <a:masterClrMapping/>
-  </p:clrMapOvr>
-</p:sld>
-</file>
-
-<file path=ppt/slides/slide111.xml><?xml version="1.0" encoding="utf-8"?>
-<p:sld xmlns:a="http://schemas.openxmlformats.org/drawingml/2006/main" xmlns:r="http://schemas.openxmlformats.org/officeDocument/2006/relationships" xmlns:p="http://schemas.openxmlformats.org/presentationml/2006/main">
-  <p:cSld>
-    <p:spTree>
-      <p:nvGrpSpPr>
         <p:cNvPr id="1" name="">
           <a:extLst>
             <a:ext uri="{FF2B5EF4-FFF2-40B4-BE49-F238E27FC236}">
@@ -9172,7 +8961,7 @@
 </p:sld>
 </file>
 
-<file path=ppt/slides/slide112.xml><?xml version="1.0" encoding="utf-8"?>
+<file path=ppt/slides/slide111.xml><?xml version="1.0" encoding="utf-8"?>
 <p:sld xmlns:a="http://schemas.openxmlformats.org/drawingml/2006/main" xmlns:r="http://schemas.openxmlformats.org/officeDocument/2006/relationships" xmlns:p="http://schemas.openxmlformats.org/presentationml/2006/main">
   <p:cSld>
     <p:spTree>
@@ -9515,7 +9304,7 @@
 </p:sld>
 </file>
 
-<file path=ppt/slides/slide113.xml><?xml version="1.0" encoding="utf-8"?>
+<file path=ppt/slides/slide112.xml><?xml version="1.0" encoding="utf-8"?>
 <p:sld xmlns:a="http://schemas.openxmlformats.org/drawingml/2006/main" xmlns:r="http://schemas.openxmlformats.org/officeDocument/2006/relationships" xmlns:p="http://schemas.openxmlformats.org/presentationml/2006/main">
   <p:cSld>
     <p:spTree>
@@ -9693,7 +9482,7 @@
 </p:sld>
 </file>
 
-<file path=ppt/slides/slide114.xml><?xml version="1.0" encoding="utf-8"?>
+<file path=ppt/slides/slide113.xml><?xml version="1.0" encoding="utf-8"?>
 <p:sld xmlns:a="http://schemas.openxmlformats.org/drawingml/2006/main" xmlns:r="http://schemas.openxmlformats.org/officeDocument/2006/relationships" xmlns:p="http://schemas.openxmlformats.org/presentationml/2006/main">
   <p:cSld>
     <p:spTree>
@@ -10072,7 +9861,7 @@
 </p:sld>
 </file>
 
-<file path=ppt/slides/slide115.xml><?xml version="1.0" encoding="utf-8"?>
+<file path=ppt/slides/slide114.xml><?xml version="1.0" encoding="utf-8"?>
 <p:sld xmlns:a="http://schemas.openxmlformats.org/drawingml/2006/main" xmlns:r="http://schemas.openxmlformats.org/officeDocument/2006/relationships" xmlns:p="http://schemas.openxmlformats.org/presentationml/2006/main">
   <p:cSld>
     <p:spTree>
@@ -10505,7 +10294,7 @@
 </p:sld>
 </file>
 
-<file path=ppt/slides/slide116.xml><?xml version="1.0" encoding="utf-8"?>
+<file path=ppt/slides/slide115.xml><?xml version="1.0" encoding="utf-8"?>
 <p:sld xmlns:a="http://schemas.openxmlformats.org/drawingml/2006/main" xmlns:r="http://schemas.openxmlformats.org/officeDocument/2006/relationships" xmlns:p="http://schemas.openxmlformats.org/presentationml/2006/main">
   <p:cSld>
     <p:spTree>
@@ -11046,7 +10835,7 @@
 </p:sld>
 </file>
 
-<file path=ppt/slides/slide117.xml><?xml version="1.0" encoding="utf-8"?>
+<file path=ppt/slides/slide116.xml><?xml version="1.0" encoding="utf-8"?>
 <p:sld xmlns:a="http://schemas.openxmlformats.org/drawingml/2006/main" xmlns:r="http://schemas.openxmlformats.org/officeDocument/2006/relationships" xmlns:p="http://schemas.openxmlformats.org/presentationml/2006/main" show="0">
   <p:cSld>
     <p:spTree>
@@ -11220,7 +11009,7 @@
 </p:sld>
 </file>
 
-<file path=ppt/slides/slide118.xml><?xml version="1.0" encoding="utf-8"?>
+<file path=ppt/slides/slide117.xml><?xml version="1.0" encoding="utf-8"?>
 <p:sld xmlns:a="http://schemas.openxmlformats.org/drawingml/2006/main" xmlns:r="http://schemas.openxmlformats.org/officeDocument/2006/relationships" xmlns:p="http://schemas.openxmlformats.org/presentationml/2006/main">
   <p:cSld>
     <p:spTree>
@@ -11411,7 +11200,7 @@
 </p:sld>
 </file>
 
-<file path=ppt/slides/slide119.xml><?xml version="1.0" encoding="utf-8"?>
+<file path=ppt/slides/slide118.xml><?xml version="1.0" encoding="utf-8"?>
 <p:sld xmlns:a="http://schemas.openxmlformats.org/drawingml/2006/main" xmlns:r="http://schemas.openxmlformats.org/officeDocument/2006/relationships" xmlns:p="http://schemas.openxmlformats.org/presentationml/2006/main" show="0">
   <p:cSld>
     <p:spTree>
@@ -11538,6 +11327,176 @@
     <p:extLst>
       <p:ext uri="{BB962C8B-B14F-4D97-AF65-F5344CB8AC3E}">
         <p14:creationId xmlns:p14="http://schemas.microsoft.com/office/powerpoint/2010/main" val="4244581232"/>
+      </p:ext>
+    </p:extLst>
+  </p:cSld>
+  <p:clrMapOvr>
+    <a:masterClrMapping/>
+  </p:clrMapOvr>
+</p:sld>
+</file>
+
+<file path=ppt/slides/slide119.xml><?xml version="1.0" encoding="utf-8"?>
+<p:sld xmlns:a="http://schemas.openxmlformats.org/drawingml/2006/main" xmlns:r="http://schemas.openxmlformats.org/officeDocument/2006/relationships" xmlns:p="http://schemas.openxmlformats.org/presentationml/2006/main" show="0">
+  <p:cSld>
+    <p:spTree>
+      <p:nvGrpSpPr>
+        <p:cNvPr id="1" name=""/>
+        <p:cNvGrpSpPr/>
+        <p:nvPr/>
+      </p:nvGrpSpPr>
+      <p:grpSpPr>
+        <a:xfrm>
+          <a:off x="0" y="0"/>
+          <a:ext cx="0" cy="0"/>
+          <a:chOff x="0" y="0"/>
+          <a:chExt cx="0" cy="0"/>
+        </a:xfrm>
+      </p:grpSpPr>
+      <p:sp>
+        <p:nvSpPr>
+          <p:cNvPr id="2" name="Content Placeholder 1">
+            <a:extLst>
+              <a:ext uri="{FF2B5EF4-FFF2-40B4-BE49-F238E27FC236}">
+                <a16:creationId xmlns:a16="http://schemas.microsoft.com/office/drawing/2014/main" id="{A917D868-9638-B6B0-F1E8-EECC6AC777AD}"/>
+              </a:ext>
+            </a:extLst>
+          </p:cNvPr>
+          <p:cNvSpPr>
+            <a:spLocks noGrp="1"/>
+          </p:cNvSpPr>
+          <p:nvPr>
+            <p:ph idx="1"/>
+          </p:nvPr>
+        </p:nvSpPr>
+        <p:spPr/>
+        <p:txBody>
+          <a:bodyPr/>
+          <a:lstStyle/>
+          <a:p>
+            <a:pPr marL="0" indent="0">
+              <a:buNone/>
+            </a:pPr>
+            <a:r>
+              <a:rPr lang="en-GB" dirty="0"/>
+              <a:t>These functions allow you set or clear stop and trace flags on lines of a function:</a:t>
+            </a:r>
+          </a:p>
+          <a:p>
+            <a:pPr marL="0" indent="0">
+              <a:buNone/>
+            </a:pPr>
+            <a:r>
+              <a:rPr lang="en-GB" dirty="0">
+                <a:solidFill>
+                  <a:srgbClr val="00B050"/>
+                </a:solidFill>
+                <a:latin typeface="APL385 Unicode" panose="020B0709000202000203" pitchFamily="49" charset="0"/>
+              </a:rPr>
+              <a:t>      2 5 7 ⎕STOP '</a:t>
+            </a:r>
+            <a:r>
+              <a:rPr lang="en-GB" dirty="0" err="1">
+                <a:solidFill>
+                  <a:srgbClr val="00B050"/>
+                </a:solidFill>
+                <a:latin typeface="APL385 Unicode" panose="020B0709000202000203" pitchFamily="49" charset="0"/>
+              </a:rPr>
+              <a:t>myReport</a:t>
+            </a:r>
+            <a:r>
+              <a:rPr lang="en-GB" dirty="0">
+                <a:solidFill>
+                  <a:srgbClr val="00B050"/>
+                </a:solidFill>
+                <a:latin typeface="APL385 Unicode" panose="020B0709000202000203" pitchFamily="49" charset="0"/>
+              </a:rPr>
+              <a:t>'</a:t>
+            </a:r>
+          </a:p>
+          <a:p>
+            <a:pPr marL="0" indent="0">
+              <a:buNone/>
+            </a:pPr>
+            <a:endParaRPr lang="en-GB" dirty="0"/>
+          </a:p>
+        </p:txBody>
+      </p:sp>
+      <p:sp>
+        <p:nvSpPr>
+          <p:cNvPr id="3" name="Title 2">
+            <a:extLst>
+              <a:ext uri="{FF2B5EF4-FFF2-40B4-BE49-F238E27FC236}">
+                <a16:creationId xmlns:a16="http://schemas.microsoft.com/office/drawing/2014/main" id="{F20D0911-C78B-4726-8C03-87285D1EFCC5}"/>
+              </a:ext>
+            </a:extLst>
+          </p:cNvPr>
+          <p:cNvSpPr>
+            <a:spLocks noGrp="1"/>
+          </p:cNvSpPr>
+          <p:nvPr>
+            <p:ph type="title"/>
+          </p:nvPr>
+        </p:nvSpPr>
+        <p:spPr/>
+        <p:txBody>
+          <a:bodyPr/>
+          <a:lstStyle/>
+          <a:p>
+            <a:r>
+              <a:rPr lang="en-GB" dirty="0">
+                <a:solidFill>
+                  <a:srgbClr val="FF6600"/>
+                </a:solidFill>
+                <a:latin typeface="APL385 Unicode" panose="020B0709000202000203" pitchFamily="49" charset="0"/>
+              </a:rPr>
+              <a:t>⎕STOP</a:t>
+            </a:r>
+            <a:r>
+              <a:rPr lang="en-GB" dirty="0"/>
+              <a:t>/</a:t>
+            </a:r>
+            <a:r>
+              <a:rPr lang="en-GB" dirty="0">
+                <a:solidFill>
+                  <a:srgbClr val="FF6600"/>
+                </a:solidFill>
+                <a:latin typeface="APL385 Unicode" panose="020B0709000202000203" pitchFamily="49" charset="0"/>
+              </a:rPr>
+              <a:t>⎕TRACE</a:t>
+            </a:r>
+          </a:p>
+        </p:txBody>
+      </p:sp>
+      <p:sp>
+        <p:nvSpPr>
+          <p:cNvPr id="4" name="Media Placeholder 3">
+            <a:extLst>
+              <a:ext uri="{FF2B5EF4-FFF2-40B4-BE49-F238E27FC236}">
+                <a16:creationId xmlns:a16="http://schemas.microsoft.com/office/drawing/2014/main" id="{88435AF1-262C-D44A-C919-4C22B435F88D}"/>
+              </a:ext>
+            </a:extLst>
+          </p:cNvPr>
+          <p:cNvSpPr>
+            <a:spLocks noGrp="1"/>
+          </p:cNvSpPr>
+          <p:nvPr>
+            <p:ph type="media" sz="quarter" idx="11"/>
+          </p:nvPr>
+        </p:nvSpPr>
+        <p:spPr/>
+        <p:txBody>
+          <a:bodyPr/>
+          <a:lstStyle/>
+          <a:p>
+            <a:endParaRPr lang="en-GB"/>
+          </a:p>
+        </p:txBody>
+      </p:sp>
+    </p:spTree>
+    <p:extLst>
+      <p:ext uri="{BB962C8B-B14F-4D97-AF65-F5344CB8AC3E}">
+        <p14:creationId xmlns:p14="http://schemas.microsoft.com/office/powerpoint/2010/main" val="3634982957"/>
       </p:ext>
     </p:extLst>
   </p:cSld>
@@ -12489,176 +12448,6 @@
 </file>
 
 <file path=ppt/slides/slide120.xml><?xml version="1.0" encoding="utf-8"?>
-<p:sld xmlns:a="http://schemas.openxmlformats.org/drawingml/2006/main" xmlns:r="http://schemas.openxmlformats.org/officeDocument/2006/relationships" xmlns:p="http://schemas.openxmlformats.org/presentationml/2006/main" show="0">
-  <p:cSld>
-    <p:spTree>
-      <p:nvGrpSpPr>
-        <p:cNvPr id="1" name=""/>
-        <p:cNvGrpSpPr/>
-        <p:nvPr/>
-      </p:nvGrpSpPr>
-      <p:grpSpPr>
-        <a:xfrm>
-          <a:off x="0" y="0"/>
-          <a:ext cx="0" cy="0"/>
-          <a:chOff x="0" y="0"/>
-          <a:chExt cx="0" cy="0"/>
-        </a:xfrm>
-      </p:grpSpPr>
-      <p:sp>
-        <p:nvSpPr>
-          <p:cNvPr id="2" name="Content Placeholder 1">
-            <a:extLst>
-              <a:ext uri="{FF2B5EF4-FFF2-40B4-BE49-F238E27FC236}">
-                <a16:creationId xmlns:a16="http://schemas.microsoft.com/office/drawing/2014/main" id="{A917D868-9638-B6B0-F1E8-EECC6AC777AD}"/>
-              </a:ext>
-            </a:extLst>
-          </p:cNvPr>
-          <p:cNvSpPr>
-            <a:spLocks noGrp="1"/>
-          </p:cNvSpPr>
-          <p:nvPr>
-            <p:ph idx="1"/>
-          </p:nvPr>
-        </p:nvSpPr>
-        <p:spPr/>
-        <p:txBody>
-          <a:bodyPr/>
-          <a:lstStyle/>
-          <a:p>
-            <a:pPr marL="0" indent="0">
-              <a:buNone/>
-            </a:pPr>
-            <a:r>
-              <a:rPr lang="en-GB" dirty="0"/>
-              <a:t>These functions allow you set or clear stop and trace flags on lines of a function:</a:t>
-            </a:r>
-          </a:p>
-          <a:p>
-            <a:pPr marL="0" indent="0">
-              <a:buNone/>
-            </a:pPr>
-            <a:r>
-              <a:rPr lang="en-GB" dirty="0">
-                <a:solidFill>
-                  <a:srgbClr val="00B050"/>
-                </a:solidFill>
-                <a:latin typeface="APL385 Unicode" panose="020B0709000202000203" pitchFamily="49" charset="0"/>
-              </a:rPr>
-              <a:t>      2 5 7 ⎕STOP '</a:t>
-            </a:r>
-            <a:r>
-              <a:rPr lang="en-GB" dirty="0" err="1">
-                <a:solidFill>
-                  <a:srgbClr val="00B050"/>
-                </a:solidFill>
-                <a:latin typeface="APL385 Unicode" panose="020B0709000202000203" pitchFamily="49" charset="0"/>
-              </a:rPr>
-              <a:t>myReport</a:t>
-            </a:r>
-            <a:r>
-              <a:rPr lang="en-GB" dirty="0">
-                <a:solidFill>
-                  <a:srgbClr val="00B050"/>
-                </a:solidFill>
-                <a:latin typeface="APL385 Unicode" panose="020B0709000202000203" pitchFamily="49" charset="0"/>
-              </a:rPr>
-              <a:t>'</a:t>
-            </a:r>
-          </a:p>
-          <a:p>
-            <a:pPr marL="0" indent="0">
-              <a:buNone/>
-            </a:pPr>
-            <a:endParaRPr lang="en-GB" dirty="0"/>
-          </a:p>
-        </p:txBody>
-      </p:sp>
-      <p:sp>
-        <p:nvSpPr>
-          <p:cNvPr id="3" name="Title 2">
-            <a:extLst>
-              <a:ext uri="{FF2B5EF4-FFF2-40B4-BE49-F238E27FC236}">
-                <a16:creationId xmlns:a16="http://schemas.microsoft.com/office/drawing/2014/main" id="{F20D0911-C78B-4726-8C03-87285D1EFCC5}"/>
-              </a:ext>
-            </a:extLst>
-          </p:cNvPr>
-          <p:cNvSpPr>
-            <a:spLocks noGrp="1"/>
-          </p:cNvSpPr>
-          <p:nvPr>
-            <p:ph type="title"/>
-          </p:nvPr>
-        </p:nvSpPr>
-        <p:spPr/>
-        <p:txBody>
-          <a:bodyPr/>
-          <a:lstStyle/>
-          <a:p>
-            <a:r>
-              <a:rPr lang="en-GB" dirty="0">
-                <a:solidFill>
-                  <a:srgbClr val="FF6600"/>
-                </a:solidFill>
-                <a:latin typeface="APL385 Unicode" panose="020B0709000202000203" pitchFamily="49" charset="0"/>
-              </a:rPr>
-              <a:t>⎕STOP</a:t>
-            </a:r>
-            <a:r>
-              <a:rPr lang="en-GB" dirty="0"/>
-              <a:t>/</a:t>
-            </a:r>
-            <a:r>
-              <a:rPr lang="en-GB" dirty="0">
-                <a:solidFill>
-                  <a:srgbClr val="FF6600"/>
-                </a:solidFill>
-                <a:latin typeface="APL385 Unicode" panose="020B0709000202000203" pitchFamily="49" charset="0"/>
-              </a:rPr>
-              <a:t>⎕TRACE</a:t>
-            </a:r>
-          </a:p>
-        </p:txBody>
-      </p:sp>
-      <p:sp>
-        <p:nvSpPr>
-          <p:cNvPr id="4" name="Media Placeholder 3">
-            <a:extLst>
-              <a:ext uri="{FF2B5EF4-FFF2-40B4-BE49-F238E27FC236}">
-                <a16:creationId xmlns:a16="http://schemas.microsoft.com/office/drawing/2014/main" id="{88435AF1-262C-D44A-C919-4C22B435F88D}"/>
-              </a:ext>
-            </a:extLst>
-          </p:cNvPr>
-          <p:cNvSpPr>
-            <a:spLocks noGrp="1"/>
-          </p:cNvSpPr>
-          <p:nvPr>
-            <p:ph type="media" sz="quarter" idx="11"/>
-          </p:nvPr>
-        </p:nvSpPr>
-        <p:spPr/>
-        <p:txBody>
-          <a:bodyPr/>
-          <a:lstStyle/>
-          <a:p>
-            <a:endParaRPr lang="en-GB"/>
-          </a:p>
-        </p:txBody>
-      </p:sp>
-    </p:spTree>
-    <p:extLst>
-      <p:ext uri="{BB962C8B-B14F-4D97-AF65-F5344CB8AC3E}">
-        <p14:creationId xmlns:p14="http://schemas.microsoft.com/office/powerpoint/2010/main" val="3634982957"/>
-      </p:ext>
-    </p:extLst>
-  </p:cSld>
-  <p:clrMapOvr>
-    <a:masterClrMapping/>
-  </p:clrMapOvr>
-</p:sld>
-</file>
-
-<file path=ppt/slides/slide121.xml><?xml version="1.0" encoding="utf-8"?>
 <p:sld xmlns:a="http://schemas.openxmlformats.org/drawingml/2006/main" xmlns:r="http://schemas.openxmlformats.org/officeDocument/2006/relationships" xmlns:p="http://schemas.openxmlformats.org/presentationml/2006/main">
   <p:cSld>
     <p:spTree>
@@ -12980,7 +12769,7 @@
 </p:sld>
 </file>
 
-<file path=ppt/slides/slide122.xml><?xml version="1.0" encoding="utf-8"?>
+<file path=ppt/slides/slide121.xml><?xml version="1.0" encoding="utf-8"?>
 <p:sld xmlns:a="http://schemas.openxmlformats.org/drawingml/2006/main" xmlns:r="http://schemas.openxmlformats.org/officeDocument/2006/relationships" xmlns:p="http://schemas.openxmlformats.org/presentationml/2006/main">
   <p:cSld>
     <p:spTree>
@@ -13189,7 +12978,7 @@
 </p:sld>
 </file>
 
-<file path=ppt/slides/slide123.xml><?xml version="1.0" encoding="utf-8"?>
+<file path=ppt/slides/slide122.xml><?xml version="1.0" encoding="utf-8"?>
 <p:sld xmlns:a="http://schemas.openxmlformats.org/drawingml/2006/main" xmlns:r="http://schemas.openxmlformats.org/officeDocument/2006/relationships" xmlns:p="http://schemas.openxmlformats.org/presentationml/2006/main">
   <p:cSld>
     <p:spTree>
@@ -14145,7 +13934,7 @@
 </p:sld>
 </file>
 
-<file path=ppt/slides/slide124.xml><?xml version="1.0" encoding="utf-8"?>
+<file path=ppt/slides/slide123.xml><?xml version="1.0" encoding="utf-8"?>
 <p:sld xmlns:a="http://schemas.openxmlformats.org/drawingml/2006/main" xmlns:r="http://schemas.openxmlformats.org/officeDocument/2006/relationships" xmlns:p="http://schemas.openxmlformats.org/presentationml/2006/main">
   <p:cSld>
     <p:spTree>
@@ -14513,7 +14302,7 @@
 </p:sld>
 </file>
 
-<file path=ppt/slides/slide125.xml><?xml version="1.0" encoding="utf-8"?>
+<file path=ppt/slides/slide124.xml><?xml version="1.0" encoding="utf-8"?>
 <p:sld xmlns:a="http://schemas.openxmlformats.org/drawingml/2006/main" xmlns:r="http://schemas.openxmlformats.org/officeDocument/2006/relationships" xmlns:p="http://schemas.openxmlformats.org/presentationml/2006/main">
   <p:cSld>
     <p:spTree>
@@ -14781,7 +14570,7 @@
 </p:sld>
 </file>
 
-<file path=ppt/slides/slide126.xml><?xml version="1.0" encoding="utf-8"?>
+<file path=ppt/slides/slide125.xml><?xml version="1.0" encoding="utf-8"?>
 <p:sld xmlns:a="http://schemas.openxmlformats.org/drawingml/2006/main" xmlns:r="http://schemas.openxmlformats.org/officeDocument/2006/relationships" xmlns:p="http://schemas.openxmlformats.org/presentationml/2006/main">
   <p:cSld>
     <p:spTree>
@@ -15023,7 +14812,7 @@
 </p:sld>
 </file>
 
-<file path=ppt/slides/slide127.xml><?xml version="1.0" encoding="utf-8"?>
+<file path=ppt/slides/slide126.xml><?xml version="1.0" encoding="utf-8"?>
 <p:sld xmlns:a="http://schemas.openxmlformats.org/drawingml/2006/main" xmlns:r="http://schemas.openxmlformats.org/officeDocument/2006/relationships" xmlns:p="http://schemas.openxmlformats.org/presentationml/2006/main">
   <p:cSld>
     <p:spTree>
@@ -15411,7 +15200,7 @@
 </p:sld>
 </file>
 
-<file path=ppt/slides/slide128.xml><?xml version="1.0" encoding="utf-8"?>
+<file path=ppt/slides/slide127.xml><?xml version="1.0" encoding="utf-8"?>
 <p:sld xmlns:a="http://schemas.openxmlformats.org/drawingml/2006/main" xmlns:r="http://schemas.openxmlformats.org/officeDocument/2006/relationships" xmlns:p="http://schemas.openxmlformats.org/presentationml/2006/main">
   <p:cSld>
     <p:spTree>
@@ -16003,7 +15792,7 @@
 </p:sld>
 </file>
 
-<file path=ppt/slides/slide129.xml><?xml version="1.0" encoding="utf-8"?>
+<file path=ppt/slides/slide128.xml><?xml version="1.0" encoding="utf-8"?>
 <p:sld xmlns:a="http://schemas.openxmlformats.org/drawingml/2006/main" xmlns:r="http://schemas.openxmlformats.org/officeDocument/2006/relationships" xmlns:p="http://schemas.openxmlformats.org/presentationml/2006/main">
   <p:cSld>
     <p:spTree>
@@ -16115,6 +15904,137 @@
     <p:extLst>
       <p:ext uri="{BB962C8B-B14F-4D97-AF65-F5344CB8AC3E}">
         <p14:creationId xmlns:p14="http://schemas.microsoft.com/office/powerpoint/2010/main" val="3474656831"/>
+      </p:ext>
+    </p:extLst>
+  </p:cSld>
+  <p:clrMapOvr>
+    <a:masterClrMapping/>
+  </p:clrMapOvr>
+</p:sld>
+</file>
+
+<file path=ppt/slides/slide129.xml><?xml version="1.0" encoding="utf-8"?>
+<p:sld xmlns:a="http://schemas.openxmlformats.org/drawingml/2006/main" xmlns:r="http://schemas.openxmlformats.org/officeDocument/2006/relationships" xmlns:p="http://schemas.openxmlformats.org/presentationml/2006/main">
+  <p:cSld>
+    <p:spTree>
+      <p:nvGrpSpPr>
+        <p:cNvPr id="1" name=""/>
+        <p:cNvGrpSpPr/>
+        <p:nvPr/>
+      </p:nvGrpSpPr>
+      <p:grpSpPr>
+        <a:xfrm>
+          <a:off x="0" y="0"/>
+          <a:ext cx="0" cy="0"/>
+          <a:chOff x="0" y="0"/>
+          <a:chExt cx="0" cy="0"/>
+        </a:xfrm>
+      </p:grpSpPr>
+      <p:sp>
+        <p:nvSpPr>
+          <p:cNvPr id="2" name="Content Placeholder 1">
+            <a:extLst>
+              <a:ext uri="{FF2B5EF4-FFF2-40B4-BE49-F238E27FC236}">
+                <a16:creationId xmlns:a16="http://schemas.microsoft.com/office/drawing/2014/main" id="{15DC527A-7681-81A5-D04B-F25A04C1733A}"/>
+              </a:ext>
+            </a:extLst>
+          </p:cNvPr>
+          <p:cNvSpPr>
+            <a:spLocks noGrp="1"/>
+          </p:cNvSpPr>
+          <p:nvPr>
+            <p:ph idx="1"/>
+          </p:nvPr>
+        </p:nvSpPr>
+        <p:spPr/>
+        <p:txBody>
+          <a:bodyPr>
+            <a:normAutofit fontScale="92500"/>
+          </a:bodyPr>
+          <a:lstStyle/>
+          <a:p>
+            <a:r>
+              <a:rPr lang="en-GB" dirty="0"/>
+              <a:t>Write an expression to determine if a name is free (unused)</a:t>
+            </a:r>
+          </a:p>
+          <a:p>
+            <a:r>
+              <a:rPr lang="en-GB" dirty="0"/>
+              <a:t>Write a function to find all the names in your workspace and return them along with their size, sorted in descending order.</a:t>
+            </a:r>
+          </a:p>
+          <a:p>
+            <a:r>
+              <a:rPr lang="en-GB" dirty="0"/>
+              <a:t>Determine how many lines of code there are in your workspace.</a:t>
+            </a:r>
+          </a:p>
+          <a:p>
+            <a:r>
+              <a:rPr lang="en-GB" dirty="0"/>
+              <a:t>Modify the function to take an argument consisting of the name classes of objects to return and a left argument to limit the number of results returned.</a:t>
+            </a:r>
+          </a:p>
+        </p:txBody>
+      </p:sp>
+      <p:sp>
+        <p:nvSpPr>
+          <p:cNvPr id="3" name="Title 2">
+            <a:extLst>
+              <a:ext uri="{FF2B5EF4-FFF2-40B4-BE49-F238E27FC236}">
+                <a16:creationId xmlns:a16="http://schemas.microsoft.com/office/drawing/2014/main" id="{95BDFA3D-1E38-FDE6-9358-D47476381054}"/>
+              </a:ext>
+            </a:extLst>
+          </p:cNvPr>
+          <p:cNvSpPr>
+            <a:spLocks noGrp="1"/>
+          </p:cNvSpPr>
+          <p:nvPr>
+            <p:ph type="title"/>
+          </p:nvPr>
+        </p:nvSpPr>
+        <p:spPr/>
+        <p:txBody>
+          <a:bodyPr/>
+          <a:lstStyle/>
+          <a:p>
+            <a:r>
+              <a:rPr lang="en-GB" dirty="0"/>
+              <a:t>Exercises</a:t>
+            </a:r>
+          </a:p>
+        </p:txBody>
+      </p:sp>
+      <p:sp>
+        <p:nvSpPr>
+          <p:cNvPr id="4" name="Media Placeholder 3">
+            <a:extLst>
+              <a:ext uri="{FF2B5EF4-FFF2-40B4-BE49-F238E27FC236}">
+                <a16:creationId xmlns:a16="http://schemas.microsoft.com/office/drawing/2014/main" id="{BF250EB5-163A-671A-51EF-8662DBC514CA}"/>
+              </a:ext>
+            </a:extLst>
+          </p:cNvPr>
+          <p:cNvSpPr>
+            <a:spLocks noGrp="1"/>
+          </p:cNvSpPr>
+          <p:nvPr>
+            <p:ph type="media" sz="quarter" idx="11"/>
+          </p:nvPr>
+        </p:nvSpPr>
+        <p:spPr/>
+        <p:txBody>
+          <a:bodyPr/>
+          <a:lstStyle/>
+          <a:p>
+            <a:endParaRPr lang="en-GB"/>
+          </a:p>
+        </p:txBody>
+      </p:sp>
+    </p:spTree>
+    <p:extLst>
+      <p:ext uri="{BB962C8B-B14F-4D97-AF65-F5344CB8AC3E}">
+        <p14:creationId xmlns:p14="http://schemas.microsoft.com/office/powerpoint/2010/main" val="3465900583"/>
       </p:ext>
     </p:extLst>
   </p:cSld>
@@ -16714,137 +16634,6 @@
 </file>
 
 <file path=ppt/slides/slide130.xml><?xml version="1.0" encoding="utf-8"?>
-<p:sld xmlns:a="http://schemas.openxmlformats.org/drawingml/2006/main" xmlns:r="http://schemas.openxmlformats.org/officeDocument/2006/relationships" xmlns:p="http://schemas.openxmlformats.org/presentationml/2006/main">
-  <p:cSld>
-    <p:spTree>
-      <p:nvGrpSpPr>
-        <p:cNvPr id="1" name=""/>
-        <p:cNvGrpSpPr/>
-        <p:nvPr/>
-      </p:nvGrpSpPr>
-      <p:grpSpPr>
-        <a:xfrm>
-          <a:off x="0" y="0"/>
-          <a:ext cx="0" cy="0"/>
-          <a:chOff x="0" y="0"/>
-          <a:chExt cx="0" cy="0"/>
-        </a:xfrm>
-      </p:grpSpPr>
-      <p:sp>
-        <p:nvSpPr>
-          <p:cNvPr id="2" name="Content Placeholder 1">
-            <a:extLst>
-              <a:ext uri="{FF2B5EF4-FFF2-40B4-BE49-F238E27FC236}">
-                <a16:creationId xmlns:a16="http://schemas.microsoft.com/office/drawing/2014/main" id="{15DC527A-7681-81A5-D04B-F25A04C1733A}"/>
-              </a:ext>
-            </a:extLst>
-          </p:cNvPr>
-          <p:cNvSpPr>
-            <a:spLocks noGrp="1"/>
-          </p:cNvSpPr>
-          <p:nvPr>
-            <p:ph idx="1"/>
-          </p:nvPr>
-        </p:nvSpPr>
-        <p:spPr/>
-        <p:txBody>
-          <a:bodyPr>
-            <a:normAutofit fontScale="92500"/>
-          </a:bodyPr>
-          <a:lstStyle/>
-          <a:p>
-            <a:r>
-              <a:rPr lang="en-GB" dirty="0"/>
-              <a:t>Write an expression to determine if a name is free (unused)</a:t>
-            </a:r>
-          </a:p>
-          <a:p>
-            <a:r>
-              <a:rPr lang="en-GB" dirty="0"/>
-              <a:t>Write a function to find all the names in your workspace and return them along with their size, sorted in descending order.</a:t>
-            </a:r>
-          </a:p>
-          <a:p>
-            <a:r>
-              <a:rPr lang="en-GB" dirty="0"/>
-              <a:t>Determine how many lines of code there are in your workspace.</a:t>
-            </a:r>
-          </a:p>
-          <a:p>
-            <a:r>
-              <a:rPr lang="en-GB" dirty="0"/>
-              <a:t>Modify the function to take an argument consisting of the name classes of objects to return and a left argument to limit the number of results returned.</a:t>
-            </a:r>
-          </a:p>
-        </p:txBody>
-      </p:sp>
-      <p:sp>
-        <p:nvSpPr>
-          <p:cNvPr id="3" name="Title 2">
-            <a:extLst>
-              <a:ext uri="{FF2B5EF4-FFF2-40B4-BE49-F238E27FC236}">
-                <a16:creationId xmlns:a16="http://schemas.microsoft.com/office/drawing/2014/main" id="{95BDFA3D-1E38-FDE6-9358-D47476381054}"/>
-              </a:ext>
-            </a:extLst>
-          </p:cNvPr>
-          <p:cNvSpPr>
-            <a:spLocks noGrp="1"/>
-          </p:cNvSpPr>
-          <p:nvPr>
-            <p:ph type="title"/>
-          </p:nvPr>
-        </p:nvSpPr>
-        <p:spPr/>
-        <p:txBody>
-          <a:bodyPr/>
-          <a:lstStyle/>
-          <a:p>
-            <a:r>
-              <a:rPr lang="en-GB" dirty="0"/>
-              <a:t>Exercises</a:t>
-            </a:r>
-          </a:p>
-        </p:txBody>
-      </p:sp>
-      <p:sp>
-        <p:nvSpPr>
-          <p:cNvPr id="4" name="Media Placeholder 3">
-            <a:extLst>
-              <a:ext uri="{FF2B5EF4-FFF2-40B4-BE49-F238E27FC236}">
-                <a16:creationId xmlns:a16="http://schemas.microsoft.com/office/drawing/2014/main" id="{BF250EB5-163A-671A-51EF-8662DBC514CA}"/>
-              </a:ext>
-            </a:extLst>
-          </p:cNvPr>
-          <p:cNvSpPr>
-            <a:spLocks noGrp="1"/>
-          </p:cNvSpPr>
-          <p:nvPr>
-            <p:ph type="media" sz="quarter" idx="11"/>
-          </p:nvPr>
-        </p:nvSpPr>
-        <p:spPr/>
-        <p:txBody>
-          <a:bodyPr/>
-          <a:lstStyle/>
-          <a:p>
-            <a:endParaRPr lang="en-GB"/>
-          </a:p>
-        </p:txBody>
-      </p:sp>
-    </p:spTree>
-    <p:extLst>
-      <p:ext uri="{BB962C8B-B14F-4D97-AF65-F5344CB8AC3E}">
-        <p14:creationId xmlns:p14="http://schemas.microsoft.com/office/powerpoint/2010/main" val="3465900583"/>
-      </p:ext>
-    </p:extLst>
-  </p:cSld>
-  <p:clrMapOvr>
-    <a:masterClrMapping/>
-  </p:clrMapOvr>
-</p:sld>
-</file>
-
-<file path=ppt/slides/slide131.xml><?xml version="1.0" encoding="utf-8"?>
 <p:sld xmlns:a="http://schemas.openxmlformats.org/drawingml/2006/main" xmlns:r="http://schemas.openxmlformats.org/officeDocument/2006/relationships" xmlns:p="http://schemas.openxmlformats.org/presentationml/2006/main" show="0">
   <p:cSld>
     <p:spTree>
@@ -39912,211 +39701,6 @@
   <p:cSld>
     <p:spTree>
       <p:nvGrpSpPr>
-        <p:cNvPr id="1" name="">
-          <a:extLst>
-            <a:ext uri="{FF2B5EF4-FFF2-40B4-BE49-F238E27FC236}">
-              <a16:creationId xmlns:a16="http://schemas.microsoft.com/office/drawing/2014/main" id="{BEC3CA1E-DDBA-B11D-6B88-680428C5E17E}"/>
-            </a:ext>
-          </a:extLst>
-        </p:cNvPr>
-        <p:cNvGrpSpPr/>
-        <p:nvPr/>
-      </p:nvGrpSpPr>
-      <p:grpSpPr>
-        <a:xfrm>
-          <a:off x="0" y="0"/>
-          <a:ext cx="0" cy="0"/>
-          <a:chOff x="0" y="0"/>
-          <a:chExt cx="0" cy="0"/>
-        </a:xfrm>
-      </p:grpSpPr>
-      <p:sp>
-        <p:nvSpPr>
-          <p:cNvPr id="2" name="Content Placeholder 1">
-            <a:extLst>
-              <a:ext uri="{FF2B5EF4-FFF2-40B4-BE49-F238E27FC236}">
-                <a16:creationId xmlns:a16="http://schemas.microsoft.com/office/drawing/2014/main" id="{D8CE13D2-407B-DEAE-54A1-CCF150E8759B}"/>
-              </a:ext>
-            </a:extLst>
-          </p:cNvPr>
-          <p:cNvSpPr>
-            <a:spLocks noGrp="1"/>
-          </p:cNvSpPr>
-          <p:nvPr>
-            <p:ph idx="1"/>
-          </p:nvPr>
-        </p:nvSpPr>
-        <p:spPr>
-          <a:xfrm>
-            <a:off x="323527" y="1377777"/>
-            <a:ext cx="8462127" cy="3331727"/>
-          </a:xfrm>
-        </p:spPr>
-        <p:txBody>
-          <a:bodyPr>
-            <a:noAutofit/>
-          </a:bodyPr>
-          <a:lstStyle/>
-          <a:p>
-            <a:pPr marL="0" indent="0">
-              <a:buNone/>
-            </a:pPr>
-            <a:r>
-              <a:rPr lang="en-GB" sz="1200" dirty="0">
-                <a:solidFill>
-                  <a:schemeClr val="tx1">
-                    <a:lumMod val="75000"/>
-                    <a:lumOff val="25000"/>
-                  </a:schemeClr>
-                </a:solidFill>
-              </a:rPr>
-              <a:t>⎕DIV   how to handle division by 0</a:t>
-            </a:r>
-          </a:p>
-          <a:p>
-            <a:pPr marL="0" indent="0">
-              <a:buNone/>
-            </a:pPr>
-            <a:endParaRPr lang="en-GB" sz="1200" dirty="0">
-              <a:solidFill>
-                <a:schemeClr val="tx1">
-                  <a:lumMod val="75000"/>
-                  <a:lumOff val="25000"/>
-                </a:schemeClr>
-              </a:solidFill>
-            </a:endParaRPr>
-          </a:p>
-          <a:p>
-            <a:pPr marL="0" indent="0">
-              <a:buNone/>
-            </a:pPr>
-            <a:r>
-              <a:rPr lang="en-GB" sz="1200" dirty="0">
-                <a:solidFill>
-                  <a:schemeClr val="tx1">
-                    <a:lumMod val="75000"/>
-                    <a:lumOff val="25000"/>
-                  </a:schemeClr>
-                </a:solidFill>
-              </a:rPr>
-              <a:t>A division by 0 (except 0÷0) is a DOMAIN error.</a:t>
-            </a:r>
-          </a:p>
-          <a:p>
-            <a:pPr marL="0" indent="0">
-              <a:buNone/>
-            </a:pPr>
-            <a:r>
-              <a:rPr lang="en-GB" sz="1200" dirty="0">
-                <a:solidFill>
-                  <a:schemeClr val="tx1">
-                    <a:lumMod val="75000"/>
-                    <a:lumOff val="25000"/>
-                  </a:schemeClr>
-                </a:solidFill>
-              </a:rPr>
-              <a:t>To override that set ⎕DIV to 1 and 0=n÷0.</a:t>
-            </a:r>
-          </a:p>
-          <a:p>
-            <a:pPr marL="0" indent="0">
-              <a:buNone/>
-            </a:pPr>
-            <a:endParaRPr lang="en-GB" sz="1200" dirty="0">
-              <a:solidFill>
-                <a:schemeClr val="tx1">
-                  <a:lumMod val="75000"/>
-                  <a:lumOff val="25000"/>
-                </a:schemeClr>
-              </a:solidFill>
-            </a:endParaRPr>
-          </a:p>
-        </p:txBody>
-      </p:sp>
-      <p:sp>
-        <p:nvSpPr>
-          <p:cNvPr id="3" name="Title 2">
-            <a:extLst>
-              <a:ext uri="{FF2B5EF4-FFF2-40B4-BE49-F238E27FC236}">
-                <a16:creationId xmlns:a16="http://schemas.microsoft.com/office/drawing/2014/main" id="{FE29F07A-DCE9-BDEF-8A65-ED8E6094EF5E}"/>
-              </a:ext>
-            </a:extLst>
-          </p:cNvPr>
-          <p:cNvSpPr>
-            <a:spLocks noGrp="1"/>
-          </p:cNvSpPr>
-          <p:nvPr>
-            <p:ph type="title"/>
-          </p:nvPr>
-        </p:nvSpPr>
-        <p:spPr/>
-        <p:txBody>
-          <a:bodyPr/>
-          <a:lstStyle/>
-          <a:p>
-            <a:r>
-              <a:rPr lang="en-GB" dirty="0"/>
-              <a:t>Division Control (</a:t>
-            </a:r>
-            <a:r>
-              <a:rPr lang="en-GB" dirty="0">
-                <a:solidFill>
-                  <a:srgbClr val="0070C0"/>
-                </a:solidFill>
-                <a:latin typeface="APL385 Unicode" panose="020B0709000202000203" pitchFamily="49" charset="0"/>
-              </a:rPr>
-              <a:t>⎕DIV</a:t>
-            </a:r>
-            <a:r>
-              <a:rPr lang="en-GB" dirty="0"/>
-              <a:t>)</a:t>
-            </a:r>
-          </a:p>
-        </p:txBody>
-      </p:sp>
-      <p:sp>
-        <p:nvSpPr>
-          <p:cNvPr id="4" name="Media Placeholder 3">
-            <a:extLst>
-              <a:ext uri="{FF2B5EF4-FFF2-40B4-BE49-F238E27FC236}">
-                <a16:creationId xmlns:a16="http://schemas.microsoft.com/office/drawing/2014/main" id="{08905E9B-6C74-B35B-D6DF-9C61E088CC70}"/>
-              </a:ext>
-            </a:extLst>
-          </p:cNvPr>
-          <p:cNvSpPr>
-            <a:spLocks noGrp="1"/>
-          </p:cNvSpPr>
-          <p:nvPr>
-            <p:ph type="media" sz="quarter" idx="11"/>
-          </p:nvPr>
-        </p:nvSpPr>
-        <p:spPr/>
-        <p:txBody>
-          <a:bodyPr/>
-          <a:lstStyle/>
-          <a:p>
-            <a:endParaRPr lang="en-GB"/>
-          </a:p>
-        </p:txBody>
-      </p:sp>
-    </p:spTree>
-    <p:extLst>
-      <p:ext uri="{BB962C8B-B14F-4D97-AF65-F5344CB8AC3E}">
-        <p14:creationId xmlns:p14="http://schemas.microsoft.com/office/powerpoint/2010/main" val="2249898324"/>
-      </p:ext>
-    </p:extLst>
-  </p:cSld>
-  <p:clrMapOvr>
-    <a:masterClrMapping/>
-  </p:clrMapOvr>
-</p:sld>
-</file>
-
-<file path=ppt/slides/slide69.xml><?xml version="1.0" encoding="utf-8"?>
-<p:sld xmlns:a="http://schemas.openxmlformats.org/drawingml/2006/main" xmlns:r="http://schemas.openxmlformats.org/officeDocument/2006/relationships" xmlns:p="http://schemas.openxmlformats.org/presentationml/2006/main">
-  <p:cSld>
-    <p:spTree>
-      <p:nvGrpSpPr>
         <p:cNvPr id="1" name=""/>
         <p:cNvGrpSpPr/>
         <p:nvPr/>
@@ -40312,6 +39896,173 @@
     <p:extLst>
       <p:ext uri="{BB962C8B-B14F-4D97-AF65-F5344CB8AC3E}">
         <p14:creationId xmlns:p14="http://schemas.microsoft.com/office/powerpoint/2010/main" val="122332937"/>
+      </p:ext>
+    </p:extLst>
+  </p:cSld>
+  <p:clrMapOvr>
+    <a:masterClrMapping/>
+  </p:clrMapOvr>
+</p:sld>
+</file>
+
+<file path=ppt/slides/slide69.xml><?xml version="1.0" encoding="utf-8"?>
+<p:sld xmlns:a="http://schemas.openxmlformats.org/drawingml/2006/main" xmlns:r="http://schemas.openxmlformats.org/officeDocument/2006/relationships" xmlns:p="http://schemas.openxmlformats.org/presentationml/2006/main">
+  <p:cSld>
+    <p:spTree>
+      <p:nvGrpSpPr>
+        <p:cNvPr id="1" name="">
+          <a:extLst>
+            <a:ext uri="{FF2B5EF4-FFF2-40B4-BE49-F238E27FC236}">
+              <a16:creationId xmlns:a16="http://schemas.microsoft.com/office/drawing/2014/main" id="{9B1AFBB4-413B-4EEE-6C52-1392928EEF4A}"/>
+            </a:ext>
+          </a:extLst>
+        </p:cNvPr>
+        <p:cNvGrpSpPr/>
+        <p:nvPr/>
+      </p:nvGrpSpPr>
+      <p:grpSpPr>
+        <a:xfrm>
+          <a:off x="0" y="0"/>
+          <a:ext cx="0" cy="0"/>
+          <a:chOff x="0" y="0"/>
+          <a:chExt cx="0" cy="0"/>
+        </a:xfrm>
+      </p:grpSpPr>
+      <p:sp>
+        <p:nvSpPr>
+          <p:cNvPr id="2" name="Content Placeholder 1">
+            <a:extLst>
+              <a:ext uri="{FF2B5EF4-FFF2-40B4-BE49-F238E27FC236}">
+                <a16:creationId xmlns:a16="http://schemas.microsoft.com/office/drawing/2014/main" id="{D2E50CD6-C669-E27E-640A-63D16A74320A}"/>
+              </a:ext>
+            </a:extLst>
+          </p:cNvPr>
+          <p:cNvSpPr>
+            <a:spLocks noGrp="1"/>
+          </p:cNvSpPr>
+          <p:nvPr>
+            <p:ph idx="1"/>
+          </p:nvPr>
+        </p:nvSpPr>
+        <p:spPr/>
+        <p:txBody>
+          <a:bodyPr/>
+          <a:lstStyle/>
+          <a:p>
+            <a:pPr marL="0" indent="0">
+              <a:buNone/>
+            </a:pPr>
+            <a:r>
+              <a:rPr lang="en-GB" dirty="0"/>
+              <a:t>Calculate the sales growth for 5 products.</a:t>
+            </a:r>
+          </a:p>
+          <a:p>
+            <a:pPr marL="0" indent="0">
+              <a:buNone/>
+            </a:pPr>
+            <a:endParaRPr lang="en-GB" dirty="0"/>
+          </a:p>
+          <a:p>
+            <a:pPr marL="0" indent="0">
+              <a:buNone/>
+            </a:pPr>
+            <a:r>
+              <a:rPr lang="en-GB" dirty="0">
+                <a:solidFill>
+                  <a:srgbClr val="00B050"/>
+                </a:solidFill>
+                <a:latin typeface="APL385 Unicode" panose="020B0709000202000203" pitchFamily="49" charset="0"/>
+              </a:rPr>
+              <a:t>      before←20 31 0 120 63</a:t>
+            </a:r>
+          </a:p>
+          <a:p>
+            <a:pPr marL="0" indent="0">
+              <a:buNone/>
+            </a:pPr>
+            <a:r>
+              <a:rPr lang="en-GB" dirty="0">
+                <a:solidFill>
+                  <a:srgbClr val="00B050"/>
+                </a:solidFill>
+                <a:latin typeface="APL385 Unicode" panose="020B0709000202000203" pitchFamily="49" charset="0"/>
+              </a:rPr>
+              <a:t>      after← 22 27 0 149 59</a:t>
+            </a:r>
+          </a:p>
+        </p:txBody>
+      </p:sp>
+      <p:sp>
+        <p:nvSpPr>
+          <p:cNvPr id="3" name="Title 2">
+            <a:extLst>
+              <a:ext uri="{FF2B5EF4-FFF2-40B4-BE49-F238E27FC236}">
+                <a16:creationId xmlns:a16="http://schemas.microsoft.com/office/drawing/2014/main" id="{A0CECBFD-EF64-2DB1-6858-7C3BA20D05F2}"/>
+              </a:ext>
+            </a:extLst>
+          </p:cNvPr>
+          <p:cNvSpPr>
+            <a:spLocks noGrp="1"/>
+          </p:cNvSpPr>
+          <p:nvPr>
+            <p:ph type="title"/>
+          </p:nvPr>
+        </p:nvSpPr>
+        <p:spPr/>
+        <p:txBody>
+          <a:bodyPr/>
+          <a:lstStyle/>
+          <a:p>
+            <a:r>
+              <a:rPr lang="en-GB" dirty="0"/>
+              <a:t>Division Control (</a:t>
+            </a:r>
+            <a:r>
+              <a:rPr lang="en-GB" dirty="0">
+                <a:solidFill>
+                  <a:srgbClr val="0070C0"/>
+                </a:solidFill>
+                <a:latin typeface="APL385 Unicode" panose="020B0709000202000203" pitchFamily="49" charset="0"/>
+              </a:rPr>
+              <a:t>⎕DIV</a:t>
+            </a:r>
+            <a:r>
+              <a:rPr lang="en-GB" dirty="0"/>
+              <a:t>)</a:t>
+            </a:r>
+          </a:p>
+        </p:txBody>
+      </p:sp>
+      <p:sp>
+        <p:nvSpPr>
+          <p:cNvPr id="4" name="Media Placeholder 3">
+            <a:extLst>
+              <a:ext uri="{FF2B5EF4-FFF2-40B4-BE49-F238E27FC236}">
+                <a16:creationId xmlns:a16="http://schemas.microsoft.com/office/drawing/2014/main" id="{0AA6C2A2-CBB5-FBAD-85D9-43E06FC71ACC}"/>
+              </a:ext>
+            </a:extLst>
+          </p:cNvPr>
+          <p:cNvSpPr>
+            <a:spLocks noGrp="1"/>
+          </p:cNvSpPr>
+          <p:nvPr>
+            <p:ph type="media" sz="quarter" idx="11"/>
+          </p:nvPr>
+        </p:nvSpPr>
+        <p:spPr/>
+        <p:txBody>
+          <a:bodyPr/>
+          <a:lstStyle/>
+          <a:p>
+            <a:endParaRPr lang="en-GB"/>
+          </a:p>
+        </p:txBody>
+      </p:sp>
+    </p:spTree>
+    <p:extLst>
+      <p:ext uri="{BB962C8B-B14F-4D97-AF65-F5344CB8AC3E}">
+        <p14:creationId xmlns:p14="http://schemas.microsoft.com/office/powerpoint/2010/main" val="4287970822"/>
       </p:ext>
     </p:extLst>
   </p:cSld>
@@ -40464,173 +40215,6 @@
         <p:cNvPr id="1" name="">
           <a:extLst>
             <a:ext uri="{FF2B5EF4-FFF2-40B4-BE49-F238E27FC236}">
-              <a16:creationId xmlns:a16="http://schemas.microsoft.com/office/drawing/2014/main" id="{9B1AFBB4-413B-4EEE-6C52-1392928EEF4A}"/>
-            </a:ext>
-          </a:extLst>
-        </p:cNvPr>
-        <p:cNvGrpSpPr/>
-        <p:nvPr/>
-      </p:nvGrpSpPr>
-      <p:grpSpPr>
-        <a:xfrm>
-          <a:off x="0" y="0"/>
-          <a:ext cx="0" cy="0"/>
-          <a:chOff x="0" y="0"/>
-          <a:chExt cx="0" cy="0"/>
-        </a:xfrm>
-      </p:grpSpPr>
-      <p:sp>
-        <p:nvSpPr>
-          <p:cNvPr id="2" name="Content Placeholder 1">
-            <a:extLst>
-              <a:ext uri="{FF2B5EF4-FFF2-40B4-BE49-F238E27FC236}">
-                <a16:creationId xmlns:a16="http://schemas.microsoft.com/office/drawing/2014/main" id="{D2E50CD6-C669-E27E-640A-63D16A74320A}"/>
-              </a:ext>
-            </a:extLst>
-          </p:cNvPr>
-          <p:cNvSpPr>
-            <a:spLocks noGrp="1"/>
-          </p:cNvSpPr>
-          <p:nvPr>
-            <p:ph idx="1"/>
-          </p:nvPr>
-        </p:nvSpPr>
-        <p:spPr/>
-        <p:txBody>
-          <a:bodyPr/>
-          <a:lstStyle/>
-          <a:p>
-            <a:pPr marL="0" indent="0">
-              <a:buNone/>
-            </a:pPr>
-            <a:r>
-              <a:rPr lang="en-GB" dirty="0"/>
-              <a:t>Calculate the sales growth for 5 products.</a:t>
-            </a:r>
-          </a:p>
-          <a:p>
-            <a:pPr marL="0" indent="0">
-              <a:buNone/>
-            </a:pPr>
-            <a:endParaRPr lang="en-GB" dirty="0"/>
-          </a:p>
-          <a:p>
-            <a:pPr marL="0" indent="0">
-              <a:buNone/>
-            </a:pPr>
-            <a:r>
-              <a:rPr lang="en-GB" dirty="0">
-                <a:solidFill>
-                  <a:srgbClr val="00B050"/>
-                </a:solidFill>
-                <a:latin typeface="APL385 Unicode" panose="020B0709000202000203" pitchFamily="49" charset="0"/>
-              </a:rPr>
-              <a:t>      before←20 31 0 120 63</a:t>
-            </a:r>
-          </a:p>
-          <a:p>
-            <a:pPr marL="0" indent="0">
-              <a:buNone/>
-            </a:pPr>
-            <a:r>
-              <a:rPr lang="en-GB" dirty="0">
-                <a:solidFill>
-                  <a:srgbClr val="00B050"/>
-                </a:solidFill>
-                <a:latin typeface="APL385 Unicode" panose="020B0709000202000203" pitchFamily="49" charset="0"/>
-              </a:rPr>
-              <a:t>      after← 22 27 0 149 59</a:t>
-            </a:r>
-          </a:p>
-        </p:txBody>
-      </p:sp>
-      <p:sp>
-        <p:nvSpPr>
-          <p:cNvPr id="3" name="Title 2">
-            <a:extLst>
-              <a:ext uri="{FF2B5EF4-FFF2-40B4-BE49-F238E27FC236}">
-                <a16:creationId xmlns:a16="http://schemas.microsoft.com/office/drawing/2014/main" id="{A0CECBFD-EF64-2DB1-6858-7C3BA20D05F2}"/>
-              </a:ext>
-            </a:extLst>
-          </p:cNvPr>
-          <p:cNvSpPr>
-            <a:spLocks noGrp="1"/>
-          </p:cNvSpPr>
-          <p:nvPr>
-            <p:ph type="title"/>
-          </p:nvPr>
-        </p:nvSpPr>
-        <p:spPr/>
-        <p:txBody>
-          <a:bodyPr/>
-          <a:lstStyle/>
-          <a:p>
-            <a:r>
-              <a:rPr lang="en-GB" dirty="0"/>
-              <a:t>Division Control (</a:t>
-            </a:r>
-            <a:r>
-              <a:rPr lang="en-GB" dirty="0">
-                <a:solidFill>
-                  <a:srgbClr val="0070C0"/>
-                </a:solidFill>
-                <a:latin typeface="APL385 Unicode" panose="020B0709000202000203" pitchFamily="49" charset="0"/>
-              </a:rPr>
-              <a:t>⎕DIV</a:t>
-            </a:r>
-            <a:r>
-              <a:rPr lang="en-GB" dirty="0"/>
-              <a:t>)</a:t>
-            </a:r>
-          </a:p>
-        </p:txBody>
-      </p:sp>
-      <p:sp>
-        <p:nvSpPr>
-          <p:cNvPr id="4" name="Media Placeholder 3">
-            <a:extLst>
-              <a:ext uri="{FF2B5EF4-FFF2-40B4-BE49-F238E27FC236}">
-                <a16:creationId xmlns:a16="http://schemas.microsoft.com/office/drawing/2014/main" id="{0AA6C2A2-CBB5-FBAD-85D9-43E06FC71ACC}"/>
-              </a:ext>
-            </a:extLst>
-          </p:cNvPr>
-          <p:cNvSpPr>
-            <a:spLocks noGrp="1"/>
-          </p:cNvSpPr>
-          <p:nvPr>
-            <p:ph type="media" sz="quarter" idx="11"/>
-          </p:nvPr>
-        </p:nvSpPr>
-        <p:spPr/>
-        <p:txBody>
-          <a:bodyPr/>
-          <a:lstStyle/>
-          <a:p>
-            <a:endParaRPr lang="en-GB"/>
-          </a:p>
-        </p:txBody>
-      </p:sp>
-    </p:spTree>
-    <p:extLst>
-      <p:ext uri="{BB962C8B-B14F-4D97-AF65-F5344CB8AC3E}">
-        <p14:creationId xmlns:p14="http://schemas.microsoft.com/office/powerpoint/2010/main" val="4287970822"/>
-      </p:ext>
-    </p:extLst>
-  </p:cSld>
-  <p:clrMapOvr>
-    <a:masterClrMapping/>
-  </p:clrMapOvr>
-</p:sld>
-</file>
-
-<file path=ppt/slides/slide71.xml><?xml version="1.0" encoding="utf-8"?>
-<p:sld xmlns:a="http://schemas.openxmlformats.org/drawingml/2006/main" xmlns:r="http://schemas.openxmlformats.org/officeDocument/2006/relationships" xmlns:p="http://schemas.openxmlformats.org/presentationml/2006/main">
-  <p:cSld>
-    <p:spTree>
-      <p:nvGrpSpPr>
-        <p:cNvPr id="1" name="">
-          <a:extLst>
-            <a:ext uri="{FF2B5EF4-FFF2-40B4-BE49-F238E27FC236}">
               <a16:creationId xmlns:a16="http://schemas.microsoft.com/office/drawing/2014/main" id="{1B52FBE9-9D9F-2DF0-25F2-FBABAA0DF4B3}"/>
             </a:ext>
           </a:extLst>
@@ -40815,7 +40399,7 @@
 </p:sld>
 </file>
 
-<file path=ppt/slides/slide72.xml><?xml version="1.0" encoding="utf-8"?>
+<file path=ppt/slides/slide71.xml><?xml version="1.0" encoding="utf-8"?>
 <p:sld xmlns:a="http://schemas.openxmlformats.org/drawingml/2006/main" xmlns:r="http://schemas.openxmlformats.org/officeDocument/2006/relationships" xmlns:p="http://schemas.openxmlformats.org/presentationml/2006/main">
   <p:cSld>
     <p:spTree>
@@ -41064,7 +40648,7 @@
 </p:sld>
 </file>
 
-<file path=ppt/slides/slide73.xml><?xml version="1.0" encoding="utf-8"?>
+<file path=ppt/slides/slide72.xml><?xml version="1.0" encoding="utf-8"?>
 <p:sld xmlns:a="http://schemas.openxmlformats.org/drawingml/2006/main" xmlns:r="http://schemas.openxmlformats.org/officeDocument/2006/relationships" xmlns:p="http://schemas.openxmlformats.org/presentationml/2006/main">
   <p:cSld>
     <p:spTree>
@@ -41321,7 +40905,7 @@
 </p:sld>
 </file>
 
-<file path=ppt/slides/slide74.xml><?xml version="1.0" encoding="utf-8"?>
+<file path=ppt/slides/slide73.xml><?xml version="1.0" encoding="utf-8"?>
 <p:sld xmlns:a="http://schemas.openxmlformats.org/drawingml/2006/main" xmlns:r="http://schemas.openxmlformats.org/officeDocument/2006/relationships" xmlns:p="http://schemas.openxmlformats.org/presentationml/2006/main" show="0">
   <p:cSld>
     <p:spTree>
@@ -41550,7 +41134,7 @@
 </p:sld>
 </file>
 
-<file path=ppt/slides/slide75.xml><?xml version="1.0" encoding="utf-8"?>
+<file path=ppt/slides/slide74.xml><?xml version="1.0" encoding="utf-8"?>
 <p:sld xmlns:a="http://schemas.openxmlformats.org/drawingml/2006/main" xmlns:r="http://schemas.openxmlformats.org/officeDocument/2006/relationships" xmlns:p="http://schemas.openxmlformats.org/presentationml/2006/main">
   <p:cSld>
     <p:spTree>
@@ -41894,7 +41478,7 @@
 </p:sld>
 </file>
 
-<file path=ppt/slides/slide76.xml><?xml version="1.0" encoding="utf-8"?>
+<file path=ppt/slides/slide75.xml><?xml version="1.0" encoding="utf-8"?>
 <p:sld xmlns:a="http://schemas.openxmlformats.org/drawingml/2006/main" xmlns:r="http://schemas.openxmlformats.org/officeDocument/2006/relationships" xmlns:p="http://schemas.openxmlformats.org/presentationml/2006/main">
   <p:cSld>
     <p:spTree>
@@ -42351,7 +41935,7 @@
 </p:sld>
 </file>
 
-<file path=ppt/slides/slide77.xml><?xml version="1.0" encoding="utf-8"?>
+<file path=ppt/slides/slide76.xml><?xml version="1.0" encoding="utf-8"?>
 <p:sld xmlns:a="http://schemas.openxmlformats.org/drawingml/2006/main" xmlns:r="http://schemas.openxmlformats.org/officeDocument/2006/relationships" xmlns:p="http://schemas.openxmlformats.org/presentationml/2006/main">
   <p:cSld>
     <p:spTree>
@@ -42590,7 +42174,7 @@
 </p:sld>
 </file>
 
-<file path=ppt/slides/slide78.xml><?xml version="1.0" encoding="utf-8"?>
+<file path=ppt/slides/slide77.xml><?xml version="1.0" encoding="utf-8"?>
 <p:sld xmlns:a="http://schemas.openxmlformats.org/drawingml/2006/main" xmlns:r="http://schemas.openxmlformats.org/officeDocument/2006/relationships" xmlns:p="http://schemas.openxmlformats.org/presentationml/2006/main">
   <p:cSld>
     <p:spTree>
@@ -43004,7 +42588,7 @@
 </p:sld>
 </file>
 
-<file path=ppt/slides/slide79.xml><?xml version="1.0" encoding="utf-8"?>
+<file path=ppt/slides/slide78.xml><?xml version="1.0" encoding="utf-8"?>
 <p:sld xmlns:a="http://schemas.openxmlformats.org/drawingml/2006/main" xmlns:r="http://schemas.openxmlformats.org/officeDocument/2006/relationships" xmlns:p="http://schemas.openxmlformats.org/presentationml/2006/main">
   <p:cSld>
     <p:spTree>
@@ -43217,6 +42801,218 @@
     <p:extLst>
       <p:ext uri="{BB962C8B-B14F-4D97-AF65-F5344CB8AC3E}">
         <p14:creationId xmlns:p14="http://schemas.microsoft.com/office/powerpoint/2010/main" val="96599081"/>
+      </p:ext>
+    </p:extLst>
+  </p:cSld>
+  <p:clrMapOvr>
+    <a:masterClrMapping/>
+  </p:clrMapOvr>
+</p:sld>
+</file>
+
+<file path=ppt/slides/slide79.xml><?xml version="1.0" encoding="utf-8"?>
+<p:sld xmlns:a="http://schemas.openxmlformats.org/drawingml/2006/main" xmlns:r="http://schemas.openxmlformats.org/officeDocument/2006/relationships" xmlns:p="http://schemas.openxmlformats.org/presentationml/2006/main">
+  <p:cSld>
+    <p:spTree>
+      <p:nvGrpSpPr>
+        <p:cNvPr id="1" name=""/>
+        <p:cNvGrpSpPr/>
+        <p:nvPr/>
+      </p:nvGrpSpPr>
+      <p:grpSpPr>
+        <a:xfrm>
+          <a:off x="0" y="0"/>
+          <a:ext cx="0" cy="0"/>
+          <a:chOff x="0" y="0"/>
+          <a:chExt cx="0" cy="0"/>
+        </a:xfrm>
+      </p:grpSpPr>
+      <p:sp>
+        <p:nvSpPr>
+          <p:cNvPr id="2" name="Content Placeholder 1">
+            <a:extLst>
+              <a:ext uri="{FF2B5EF4-FFF2-40B4-BE49-F238E27FC236}">
+                <a16:creationId xmlns:a16="http://schemas.microsoft.com/office/drawing/2014/main" id="{46DC563E-E29C-C58D-9C08-4AE1570B1492}"/>
+              </a:ext>
+            </a:extLst>
+          </p:cNvPr>
+          <p:cNvSpPr>
+            <a:spLocks noGrp="1"/>
+          </p:cNvSpPr>
+          <p:nvPr>
+            <p:ph idx="1"/>
+          </p:nvPr>
+        </p:nvSpPr>
+        <p:spPr/>
+        <p:txBody>
+          <a:bodyPr/>
+          <a:lstStyle/>
+          <a:p>
+            <a:pPr marL="0" indent="0">
+              <a:buNone/>
+            </a:pPr>
+            <a:r>
+              <a:rPr lang="en-GB" dirty="0">
+                <a:solidFill>
+                  <a:schemeClr val="tx1">
+                    <a:lumMod val="75000"/>
+                    <a:lumOff val="25000"/>
+                  </a:schemeClr>
+                </a:solidFill>
+              </a:rPr>
+              <a:t>This variable affects the default display of numbers.</a:t>
+            </a:r>
+          </a:p>
+          <a:p>
+            <a:pPr marL="0" indent="0">
+              <a:buNone/>
+            </a:pPr>
+            <a:r>
+              <a:rPr lang="en-GB" sz="2100" dirty="0">
+                <a:solidFill>
+                  <a:srgbClr val="0070C0"/>
+                </a:solidFill>
+                <a:latin typeface="APL385 Unicode" pitchFamily="49" charset="0"/>
+              </a:rPr>
+              <a:t>	</a:t>
+            </a:r>
+            <a:r>
+              <a:rPr lang="en-GB" sz="2100" dirty="0">
+                <a:solidFill>
+                  <a:srgbClr val="00B050"/>
+                </a:solidFill>
+                <a:latin typeface="APL385 Unicode" pitchFamily="49" charset="0"/>
+              </a:rPr>
+              <a:t>⎕pp←4  ⋄ ○1</a:t>
+            </a:r>
+          </a:p>
+          <a:p>
+            <a:pPr marL="0" indent="0">
+              <a:buNone/>
+            </a:pPr>
+            <a:r>
+              <a:rPr lang="en-GB" sz="2100" dirty="0">
+                <a:solidFill>
+                  <a:schemeClr val="accent3">
+                    <a:lumMod val="50000"/>
+                  </a:schemeClr>
+                </a:solidFill>
+                <a:latin typeface="APL385 Unicode" pitchFamily="49" charset="0"/>
+              </a:rPr>
+              <a:t>3.142</a:t>
+            </a:r>
+          </a:p>
+          <a:p>
+            <a:pPr marL="0" indent="0">
+              <a:buNone/>
+            </a:pPr>
+            <a:r>
+              <a:rPr lang="en-GB" sz="2100" dirty="0">
+                <a:solidFill>
+                  <a:srgbClr val="0070C0"/>
+                </a:solidFill>
+                <a:latin typeface="APL385 Unicode" pitchFamily="49" charset="0"/>
+              </a:rPr>
+              <a:t>	</a:t>
+            </a:r>
+            <a:r>
+              <a:rPr lang="en-GB" sz="2100" dirty="0">
+                <a:solidFill>
+                  <a:srgbClr val="00B050"/>
+                </a:solidFill>
+                <a:latin typeface="APL385 Unicode" pitchFamily="49" charset="0"/>
+              </a:rPr>
+              <a:t>⎕pp←17 ⋄ ○1</a:t>
+            </a:r>
+          </a:p>
+          <a:p>
+            <a:pPr marL="0" indent="0">
+              <a:buNone/>
+            </a:pPr>
+            <a:r>
+              <a:rPr lang="en-GB" sz="2100" dirty="0">
+                <a:solidFill>
+                  <a:schemeClr val="accent3">
+                    <a:lumMod val="50000"/>
+                  </a:schemeClr>
+                </a:solidFill>
+                <a:latin typeface="APL385 Unicode" pitchFamily="49" charset="0"/>
+              </a:rPr>
+              <a:t>3.141592653589793</a:t>
+            </a:r>
+          </a:p>
+        </p:txBody>
+      </p:sp>
+      <p:sp>
+        <p:nvSpPr>
+          <p:cNvPr id="3" name="Title 2">
+            <a:extLst>
+              <a:ext uri="{FF2B5EF4-FFF2-40B4-BE49-F238E27FC236}">
+                <a16:creationId xmlns:a16="http://schemas.microsoft.com/office/drawing/2014/main" id="{3A2AA5CF-768F-169A-FD6B-1107BE8105E0}"/>
+              </a:ext>
+            </a:extLst>
+          </p:cNvPr>
+          <p:cNvSpPr>
+            <a:spLocks noGrp="1"/>
+          </p:cNvSpPr>
+          <p:nvPr>
+            <p:ph type="title"/>
+          </p:nvPr>
+        </p:nvSpPr>
+        <p:spPr/>
+        <p:txBody>
+          <a:bodyPr/>
+          <a:lstStyle/>
+          <a:p>
+            <a:r>
+              <a:rPr lang="en-GB" dirty="0"/>
+              <a:t>Print Precision (</a:t>
+            </a:r>
+            <a:r>
+              <a:rPr lang="en-GB" dirty="0">
+                <a:solidFill>
+                  <a:srgbClr val="0070C0"/>
+                </a:solidFill>
+                <a:latin typeface="APL385 Unicode" panose="020B0709000202000203" pitchFamily="49" charset="0"/>
+              </a:rPr>
+              <a:t>⎕PP</a:t>
+            </a:r>
+            <a:r>
+              <a:rPr lang="en-GB" dirty="0"/>
+              <a:t>)</a:t>
+            </a:r>
+          </a:p>
+        </p:txBody>
+      </p:sp>
+      <p:sp>
+        <p:nvSpPr>
+          <p:cNvPr id="4" name="Media Placeholder 3">
+            <a:extLst>
+              <a:ext uri="{FF2B5EF4-FFF2-40B4-BE49-F238E27FC236}">
+                <a16:creationId xmlns:a16="http://schemas.microsoft.com/office/drawing/2014/main" id="{D6C717F7-039E-1C7A-2CF7-F61B308FF88B}"/>
+              </a:ext>
+            </a:extLst>
+          </p:cNvPr>
+          <p:cNvSpPr>
+            <a:spLocks noGrp="1"/>
+          </p:cNvSpPr>
+          <p:nvPr>
+            <p:ph type="media" sz="quarter" idx="11"/>
+          </p:nvPr>
+        </p:nvSpPr>
+        <p:spPr/>
+        <p:txBody>
+          <a:bodyPr/>
+          <a:lstStyle/>
+          <a:p>
+            <a:endParaRPr lang="en-GB"/>
+          </a:p>
+        </p:txBody>
+      </p:sp>
+    </p:spTree>
+    <p:extLst>
+      <p:ext uri="{BB962C8B-B14F-4D97-AF65-F5344CB8AC3E}">
+        <p14:creationId xmlns:p14="http://schemas.microsoft.com/office/powerpoint/2010/main" val="2670184476"/>
       </p:ext>
     </p:extLst>
   </p:cSld>
@@ -44093,218 +43889,6 @@
   <p:cSld>
     <p:spTree>
       <p:nvGrpSpPr>
-        <p:cNvPr id="1" name=""/>
-        <p:cNvGrpSpPr/>
-        <p:nvPr/>
-      </p:nvGrpSpPr>
-      <p:grpSpPr>
-        <a:xfrm>
-          <a:off x="0" y="0"/>
-          <a:ext cx="0" cy="0"/>
-          <a:chOff x="0" y="0"/>
-          <a:chExt cx="0" cy="0"/>
-        </a:xfrm>
-      </p:grpSpPr>
-      <p:sp>
-        <p:nvSpPr>
-          <p:cNvPr id="2" name="Content Placeholder 1">
-            <a:extLst>
-              <a:ext uri="{FF2B5EF4-FFF2-40B4-BE49-F238E27FC236}">
-                <a16:creationId xmlns:a16="http://schemas.microsoft.com/office/drawing/2014/main" id="{46DC563E-E29C-C58D-9C08-4AE1570B1492}"/>
-              </a:ext>
-            </a:extLst>
-          </p:cNvPr>
-          <p:cNvSpPr>
-            <a:spLocks noGrp="1"/>
-          </p:cNvSpPr>
-          <p:nvPr>
-            <p:ph idx="1"/>
-          </p:nvPr>
-        </p:nvSpPr>
-        <p:spPr/>
-        <p:txBody>
-          <a:bodyPr/>
-          <a:lstStyle/>
-          <a:p>
-            <a:pPr marL="0" indent="0">
-              <a:buNone/>
-            </a:pPr>
-            <a:r>
-              <a:rPr lang="en-GB" dirty="0">
-                <a:solidFill>
-                  <a:schemeClr val="tx1">
-                    <a:lumMod val="75000"/>
-                    <a:lumOff val="25000"/>
-                  </a:schemeClr>
-                </a:solidFill>
-              </a:rPr>
-              <a:t>This variable affects the default display of numbers.</a:t>
-            </a:r>
-          </a:p>
-          <a:p>
-            <a:pPr marL="0" indent="0">
-              <a:buNone/>
-            </a:pPr>
-            <a:r>
-              <a:rPr lang="en-GB" sz="2100" dirty="0">
-                <a:solidFill>
-                  <a:srgbClr val="0070C0"/>
-                </a:solidFill>
-                <a:latin typeface="APL385 Unicode" pitchFamily="49" charset="0"/>
-              </a:rPr>
-              <a:t>	</a:t>
-            </a:r>
-            <a:r>
-              <a:rPr lang="en-GB" sz="2100" dirty="0">
-                <a:solidFill>
-                  <a:srgbClr val="00B050"/>
-                </a:solidFill>
-                <a:latin typeface="APL385 Unicode" pitchFamily="49" charset="0"/>
-              </a:rPr>
-              <a:t>⎕pp←4  ⋄ ○1</a:t>
-            </a:r>
-          </a:p>
-          <a:p>
-            <a:pPr marL="0" indent="0">
-              <a:buNone/>
-            </a:pPr>
-            <a:r>
-              <a:rPr lang="en-GB" sz="2100" dirty="0">
-                <a:solidFill>
-                  <a:schemeClr val="accent3">
-                    <a:lumMod val="50000"/>
-                  </a:schemeClr>
-                </a:solidFill>
-                <a:latin typeface="APL385 Unicode" pitchFamily="49" charset="0"/>
-              </a:rPr>
-              <a:t>3.142</a:t>
-            </a:r>
-          </a:p>
-          <a:p>
-            <a:pPr marL="0" indent="0">
-              <a:buNone/>
-            </a:pPr>
-            <a:r>
-              <a:rPr lang="en-GB" sz="2100" dirty="0">
-                <a:solidFill>
-                  <a:srgbClr val="0070C0"/>
-                </a:solidFill>
-                <a:latin typeface="APL385 Unicode" pitchFamily="49" charset="0"/>
-              </a:rPr>
-              <a:t>	</a:t>
-            </a:r>
-            <a:r>
-              <a:rPr lang="en-GB" sz="2100" dirty="0">
-                <a:solidFill>
-                  <a:srgbClr val="00B050"/>
-                </a:solidFill>
-                <a:latin typeface="APL385 Unicode" pitchFamily="49" charset="0"/>
-              </a:rPr>
-              <a:t>⎕pp←17 ⋄ ○1</a:t>
-            </a:r>
-          </a:p>
-          <a:p>
-            <a:pPr marL="0" indent="0">
-              <a:buNone/>
-            </a:pPr>
-            <a:r>
-              <a:rPr lang="en-GB" sz="2100" dirty="0">
-                <a:solidFill>
-                  <a:schemeClr val="accent3">
-                    <a:lumMod val="50000"/>
-                  </a:schemeClr>
-                </a:solidFill>
-                <a:latin typeface="APL385 Unicode" pitchFamily="49" charset="0"/>
-              </a:rPr>
-              <a:t>3.141592653589793</a:t>
-            </a:r>
-          </a:p>
-        </p:txBody>
-      </p:sp>
-      <p:sp>
-        <p:nvSpPr>
-          <p:cNvPr id="3" name="Title 2">
-            <a:extLst>
-              <a:ext uri="{FF2B5EF4-FFF2-40B4-BE49-F238E27FC236}">
-                <a16:creationId xmlns:a16="http://schemas.microsoft.com/office/drawing/2014/main" id="{3A2AA5CF-768F-169A-FD6B-1107BE8105E0}"/>
-              </a:ext>
-            </a:extLst>
-          </p:cNvPr>
-          <p:cNvSpPr>
-            <a:spLocks noGrp="1"/>
-          </p:cNvSpPr>
-          <p:nvPr>
-            <p:ph type="title"/>
-          </p:nvPr>
-        </p:nvSpPr>
-        <p:spPr/>
-        <p:txBody>
-          <a:bodyPr/>
-          <a:lstStyle/>
-          <a:p>
-            <a:r>
-              <a:rPr lang="en-GB" dirty="0"/>
-              <a:t>Print Precision (</a:t>
-            </a:r>
-            <a:r>
-              <a:rPr lang="en-GB" dirty="0">
-                <a:solidFill>
-                  <a:srgbClr val="0070C0"/>
-                </a:solidFill>
-                <a:latin typeface="APL385 Unicode" panose="020B0709000202000203" pitchFamily="49" charset="0"/>
-              </a:rPr>
-              <a:t>⎕PP</a:t>
-            </a:r>
-            <a:r>
-              <a:rPr lang="en-GB" dirty="0"/>
-              <a:t>)</a:t>
-            </a:r>
-          </a:p>
-        </p:txBody>
-      </p:sp>
-      <p:sp>
-        <p:nvSpPr>
-          <p:cNvPr id="4" name="Media Placeholder 3">
-            <a:extLst>
-              <a:ext uri="{FF2B5EF4-FFF2-40B4-BE49-F238E27FC236}">
-                <a16:creationId xmlns:a16="http://schemas.microsoft.com/office/drawing/2014/main" id="{D6C717F7-039E-1C7A-2CF7-F61B308FF88B}"/>
-              </a:ext>
-            </a:extLst>
-          </p:cNvPr>
-          <p:cNvSpPr>
-            <a:spLocks noGrp="1"/>
-          </p:cNvSpPr>
-          <p:nvPr>
-            <p:ph type="media" sz="quarter" idx="11"/>
-          </p:nvPr>
-        </p:nvSpPr>
-        <p:spPr/>
-        <p:txBody>
-          <a:bodyPr/>
-          <a:lstStyle/>
-          <a:p>
-            <a:endParaRPr lang="en-GB"/>
-          </a:p>
-        </p:txBody>
-      </p:sp>
-    </p:spTree>
-    <p:extLst>
-      <p:ext uri="{BB962C8B-B14F-4D97-AF65-F5344CB8AC3E}">
-        <p14:creationId xmlns:p14="http://schemas.microsoft.com/office/powerpoint/2010/main" val="2670184476"/>
-      </p:ext>
-    </p:extLst>
-  </p:cSld>
-  <p:clrMapOvr>
-    <a:masterClrMapping/>
-  </p:clrMapOvr>
-</p:sld>
-</file>
-
-<file path=ppt/slides/slide81.xml><?xml version="1.0" encoding="utf-8"?>
-<p:sld xmlns:a="http://schemas.openxmlformats.org/drawingml/2006/main" xmlns:r="http://schemas.openxmlformats.org/officeDocument/2006/relationships" xmlns:p="http://schemas.openxmlformats.org/presentationml/2006/main">
-  <p:cSld>
-    <p:spTree>
-      <p:nvGrpSpPr>
         <p:cNvPr id="1" name="">
           <a:extLst>
             <a:ext uri="{FF2B5EF4-FFF2-40B4-BE49-F238E27FC236}">
@@ -44511,7 +44095,7 @@
 </p:sld>
 </file>
 
-<file path=ppt/slides/slide82.xml><?xml version="1.0" encoding="utf-8"?>
+<file path=ppt/slides/slide81.xml><?xml version="1.0" encoding="utf-8"?>
 <p:sld xmlns:a="http://schemas.openxmlformats.org/drawingml/2006/main" xmlns:r="http://schemas.openxmlformats.org/officeDocument/2006/relationships" xmlns:p="http://schemas.openxmlformats.org/presentationml/2006/main">
   <p:cSld>
     <p:spTree>
@@ -44822,7 +44406,7 @@
 </p:sld>
 </file>
 
-<file path=ppt/slides/slide83.xml><?xml version="1.0" encoding="utf-8"?>
+<file path=ppt/slides/slide82.xml><?xml version="1.0" encoding="utf-8"?>
 <p:sld xmlns:a="http://schemas.openxmlformats.org/drawingml/2006/main" xmlns:r="http://schemas.openxmlformats.org/officeDocument/2006/relationships" xmlns:p="http://schemas.openxmlformats.org/presentationml/2006/main">
   <p:cSld>
     <p:spTree>
@@ -45086,7 +44670,7 @@
 </p:sld>
 </file>
 
-<file path=ppt/slides/slide84.xml><?xml version="1.0" encoding="utf-8"?>
+<file path=ppt/slides/slide83.xml><?xml version="1.0" encoding="utf-8"?>
 <p:sld xmlns:a="http://schemas.openxmlformats.org/drawingml/2006/main" xmlns:r="http://schemas.openxmlformats.org/officeDocument/2006/relationships" xmlns:p="http://schemas.openxmlformats.org/presentationml/2006/main" show="0">
   <p:cSld>
     <p:spTree>
@@ -45258,7 +44842,7 @@
 </p:sld>
 </file>
 
-<file path=ppt/slides/slide85.xml><?xml version="1.0" encoding="utf-8"?>
+<file path=ppt/slides/slide84.xml><?xml version="1.0" encoding="utf-8"?>
 <p:sld xmlns:a="http://schemas.openxmlformats.org/drawingml/2006/main" xmlns:r="http://schemas.openxmlformats.org/officeDocument/2006/relationships" xmlns:p="http://schemas.openxmlformats.org/presentationml/2006/main">
   <p:cSld>
     <p:spTree>
@@ -45388,7 +44972,7 @@
 </p:sld>
 </file>
 
-<file path=ppt/slides/slide86.xml><?xml version="1.0" encoding="utf-8"?>
+<file path=ppt/slides/slide85.xml><?xml version="1.0" encoding="utf-8"?>
 <p:sld xmlns:a="http://schemas.openxmlformats.org/drawingml/2006/main" xmlns:r="http://schemas.openxmlformats.org/officeDocument/2006/relationships" xmlns:p="http://schemas.openxmlformats.org/presentationml/2006/main">
   <p:cSld>
     <p:spTree>
@@ -46052,7 +45636,7 @@
 </p:sld>
 </file>
 
-<file path=ppt/slides/slide87.xml><?xml version="1.0" encoding="utf-8"?>
+<file path=ppt/slides/slide86.xml><?xml version="1.0" encoding="utf-8"?>
 <p:sld xmlns:a="http://schemas.openxmlformats.org/drawingml/2006/main" xmlns:r="http://schemas.openxmlformats.org/officeDocument/2006/relationships" xmlns:p="http://schemas.openxmlformats.org/presentationml/2006/main">
   <p:cSld>
     <p:spTree>
@@ -46336,7 +45920,7 @@
 </p:sld>
 </file>
 
-<file path=ppt/slides/slide88.xml><?xml version="1.0" encoding="utf-8"?>
+<file path=ppt/slides/slide87.xml><?xml version="1.0" encoding="utf-8"?>
 <p:sld xmlns:a="http://schemas.openxmlformats.org/drawingml/2006/main" xmlns:r="http://schemas.openxmlformats.org/officeDocument/2006/relationships" xmlns:p="http://schemas.openxmlformats.org/presentationml/2006/main">
   <p:cSld>
     <p:spTree>
@@ -46534,7 +46118,7 @@
 </p:sld>
 </file>
 
-<file path=ppt/slides/slide89.xml><?xml version="1.0" encoding="utf-8"?>
+<file path=ppt/slides/slide88.xml><?xml version="1.0" encoding="utf-8"?>
 <p:sld xmlns:a="http://schemas.openxmlformats.org/drawingml/2006/main" xmlns:r="http://schemas.openxmlformats.org/officeDocument/2006/relationships" xmlns:p="http://schemas.openxmlformats.org/presentationml/2006/main">
   <p:cSld>
     <p:spTree>
@@ -46786,6 +46370,163 @@
     <p:extLst>
       <p:ext uri="{BB962C8B-B14F-4D97-AF65-F5344CB8AC3E}">
         <p14:creationId xmlns:p14="http://schemas.microsoft.com/office/powerpoint/2010/main" val="108782468"/>
+      </p:ext>
+    </p:extLst>
+  </p:cSld>
+  <p:clrMapOvr>
+    <a:masterClrMapping/>
+  </p:clrMapOvr>
+</p:sld>
+</file>
+
+<file path=ppt/slides/slide89.xml><?xml version="1.0" encoding="utf-8"?>
+<p:sld xmlns:a="http://schemas.openxmlformats.org/drawingml/2006/main" xmlns:r="http://schemas.openxmlformats.org/officeDocument/2006/relationships" xmlns:p="http://schemas.openxmlformats.org/presentationml/2006/main">
+  <p:cSld>
+    <p:spTree>
+      <p:nvGrpSpPr>
+        <p:cNvPr id="1" name="">
+          <a:extLst>
+            <a:ext uri="{FF2B5EF4-FFF2-40B4-BE49-F238E27FC236}">
+              <a16:creationId xmlns:a16="http://schemas.microsoft.com/office/drawing/2014/main" id="{2D84276B-F231-5948-96E3-5D57545F4A93}"/>
+            </a:ext>
+          </a:extLst>
+        </p:cNvPr>
+        <p:cNvGrpSpPr/>
+        <p:nvPr/>
+      </p:nvGrpSpPr>
+      <p:grpSpPr>
+        <a:xfrm>
+          <a:off x="0" y="0"/>
+          <a:ext cx="0" cy="0"/>
+          <a:chOff x="0" y="0"/>
+          <a:chExt cx="0" cy="0"/>
+        </a:xfrm>
+      </p:grpSpPr>
+      <p:sp>
+        <p:nvSpPr>
+          <p:cNvPr id="2" name="Content Placeholder 1">
+            <a:extLst>
+              <a:ext uri="{FF2B5EF4-FFF2-40B4-BE49-F238E27FC236}">
+                <a16:creationId xmlns:a16="http://schemas.microsoft.com/office/drawing/2014/main" id="{90088442-0F83-5E45-7D3A-4463E03450F7}"/>
+              </a:ext>
+            </a:extLst>
+          </p:cNvPr>
+          <p:cNvSpPr>
+            <a:spLocks noGrp="1"/>
+          </p:cNvSpPr>
+          <p:nvPr>
+            <p:ph idx="1"/>
+          </p:nvPr>
+        </p:nvSpPr>
+        <p:spPr/>
+        <p:txBody>
+          <a:bodyPr>
+            <a:normAutofit/>
+          </a:bodyPr>
+          <a:lstStyle/>
+          <a:p>
+            <a:pPr marL="0" indent="0">
+              <a:buNone/>
+            </a:pPr>
+            <a:r>
+              <a:rPr lang="en-GB" dirty="0"/>
+              <a:t>User command </a:t>
+            </a:r>
+            <a:r>
+              <a:rPr lang="en-GB" dirty="0">
+                <a:solidFill>
+                  <a:srgbClr val="FF6600"/>
+                </a:solidFill>
+                <a:latin typeface="APL385 Unicode" panose="020B0709000202000203" pitchFamily="49" charset="0"/>
+              </a:rPr>
+              <a:t>]Names</a:t>
+            </a:r>
+            <a:r>
+              <a:rPr lang="en-GB" dirty="0"/>
+              <a:t> is a pretty-printing cover for </a:t>
+            </a:r>
+            <a:r>
+              <a:rPr lang="en-GB" dirty="0">
+                <a:solidFill>
+                  <a:srgbClr val="FF6600"/>
+                </a:solidFill>
+                <a:latin typeface="APL385 Unicode" panose="020B0709000202000203" pitchFamily="49" charset="0"/>
+              </a:rPr>
+              <a:t>⎕NL</a:t>
+            </a:r>
+          </a:p>
+        </p:txBody>
+      </p:sp>
+      <p:sp>
+        <p:nvSpPr>
+          <p:cNvPr id="3" name="Title 2">
+            <a:extLst>
+              <a:ext uri="{FF2B5EF4-FFF2-40B4-BE49-F238E27FC236}">
+                <a16:creationId xmlns:a16="http://schemas.microsoft.com/office/drawing/2014/main" id="{65B93C0F-077A-02E5-EEBD-AE1301924981}"/>
+              </a:ext>
+            </a:extLst>
+          </p:cNvPr>
+          <p:cNvSpPr>
+            <a:spLocks noGrp="1"/>
+          </p:cNvSpPr>
+          <p:nvPr>
+            <p:ph type="title"/>
+          </p:nvPr>
+        </p:nvSpPr>
+        <p:spPr/>
+        <p:txBody>
+          <a:bodyPr/>
+          <a:lstStyle/>
+          <a:p>
+            <a:r>
+              <a:rPr lang="en-GB" dirty="0"/>
+              <a:t>Name List (</a:t>
+            </a:r>
+            <a:r>
+              <a:rPr lang="en-GB" dirty="0">
+                <a:solidFill>
+                  <a:srgbClr val="FF6600"/>
+                </a:solidFill>
+                <a:latin typeface="APL385 Unicode" panose="020B0709000202000203" pitchFamily="49" charset="0"/>
+              </a:rPr>
+              <a:t>⎕NL</a:t>
+            </a:r>
+            <a:r>
+              <a:rPr lang="en-GB" dirty="0"/>
+              <a:t>)</a:t>
+            </a:r>
+          </a:p>
+        </p:txBody>
+      </p:sp>
+      <p:sp>
+        <p:nvSpPr>
+          <p:cNvPr id="4" name="Media Placeholder 3">
+            <a:extLst>
+              <a:ext uri="{FF2B5EF4-FFF2-40B4-BE49-F238E27FC236}">
+                <a16:creationId xmlns:a16="http://schemas.microsoft.com/office/drawing/2014/main" id="{A94F166C-F5C0-9193-6308-7BC8ECA43E7C}"/>
+              </a:ext>
+            </a:extLst>
+          </p:cNvPr>
+          <p:cNvSpPr>
+            <a:spLocks noGrp="1"/>
+          </p:cNvSpPr>
+          <p:nvPr>
+            <p:ph type="media" sz="quarter" idx="11"/>
+          </p:nvPr>
+        </p:nvSpPr>
+        <p:spPr/>
+        <p:txBody>
+          <a:bodyPr/>
+          <a:lstStyle/>
+          <a:p>
+            <a:endParaRPr lang="en-GB"/>
+          </a:p>
+        </p:txBody>
+      </p:sp>
+    </p:spTree>
+    <p:extLst>
+      <p:ext uri="{BB962C8B-B14F-4D97-AF65-F5344CB8AC3E}">
+        <p14:creationId xmlns:p14="http://schemas.microsoft.com/office/powerpoint/2010/main" val="4033421497"/>
       </p:ext>
     </p:extLst>
   </p:cSld>
@@ -47653,163 +47394,6 @@
         <p:cNvPr id="1" name="">
           <a:extLst>
             <a:ext uri="{FF2B5EF4-FFF2-40B4-BE49-F238E27FC236}">
-              <a16:creationId xmlns:a16="http://schemas.microsoft.com/office/drawing/2014/main" id="{2D84276B-F231-5948-96E3-5D57545F4A93}"/>
-            </a:ext>
-          </a:extLst>
-        </p:cNvPr>
-        <p:cNvGrpSpPr/>
-        <p:nvPr/>
-      </p:nvGrpSpPr>
-      <p:grpSpPr>
-        <a:xfrm>
-          <a:off x="0" y="0"/>
-          <a:ext cx="0" cy="0"/>
-          <a:chOff x="0" y="0"/>
-          <a:chExt cx="0" cy="0"/>
-        </a:xfrm>
-      </p:grpSpPr>
-      <p:sp>
-        <p:nvSpPr>
-          <p:cNvPr id="2" name="Content Placeholder 1">
-            <a:extLst>
-              <a:ext uri="{FF2B5EF4-FFF2-40B4-BE49-F238E27FC236}">
-                <a16:creationId xmlns:a16="http://schemas.microsoft.com/office/drawing/2014/main" id="{90088442-0F83-5E45-7D3A-4463E03450F7}"/>
-              </a:ext>
-            </a:extLst>
-          </p:cNvPr>
-          <p:cNvSpPr>
-            <a:spLocks noGrp="1"/>
-          </p:cNvSpPr>
-          <p:nvPr>
-            <p:ph idx="1"/>
-          </p:nvPr>
-        </p:nvSpPr>
-        <p:spPr/>
-        <p:txBody>
-          <a:bodyPr>
-            <a:normAutofit/>
-          </a:bodyPr>
-          <a:lstStyle/>
-          <a:p>
-            <a:pPr marL="0" indent="0">
-              <a:buNone/>
-            </a:pPr>
-            <a:r>
-              <a:rPr lang="en-GB" dirty="0"/>
-              <a:t>User command </a:t>
-            </a:r>
-            <a:r>
-              <a:rPr lang="en-GB" dirty="0">
-                <a:solidFill>
-                  <a:srgbClr val="FF6600"/>
-                </a:solidFill>
-                <a:latin typeface="APL385 Unicode" panose="020B0709000202000203" pitchFamily="49" charset="0"/>
-              </a:rPr>
-              <a:t>]Names</a:t>
-            </a:r>
-            <a:r>
-              <a:rPr lang="en-GB" dirty="0"/>
-              <a:t> is a pretty-printing cover for </a:t>
-            </a:r>
-            <a:r>
-              <a:rPr lang="en-GB" dirty="0">
-                <a:solidFill>
-                  <a:srgbClr val="FF6600"/>
-                </a:solidFill>
-                <a:latin typeface="APL385 Unicode" panose="020B0709000202000203" pitchFamily="49" charset="0"/>
-              </a:rPr>
-              <a:t>⎕NL</a:t>
-            </a:r>
-          </a:p>
-        </p:txBody>
-      </p:sp>
-      <p:sp>
-        <p:nvSpPr>
-          <p:cNvPr id="3" name="Title 2">
-            <a:extLst>
-              <a:ext uri="{FF2B5EF4-FFF2-40B4-BE49-F238E27FC236}">
-                <a16:creationId xmlns:a16="http://schemas.microsoft.com/office/drawing/2014/main" id="{65B93C0F-077A-02E5-EEBD-AE1301924981}"/>
-              </a:ext>
-            </a:extLst>
-          </p:cNvPr>
-          <p:cNvSpPr>
-            <a:spLocks noGrp="1"/>
-          </p:cNvSpPr>
-          <p:nvPr>
-            <p:ph type="title"/>
-          </p:nvPr>
-        </p:nvSpPr>
-        <p:spPr/>
-        <p:txBody>
-          <a:bodyPr/>
-          <a:lstStyle/>
-          <a:p>
-            <a:r>
-              <a:rPr lang="en-GB" dirty="0"/>
-              <a:t>Name List (</a:t>
-            </a:r>
-            <a:r>
-              <a:rPr lang="en-GB" dirty="0">
-                <a:solidFill>
-                  <a:srgbClr val="FF6600"/>
-                </a:solidFill>
-                <a:latin typeface="APL385 Unicode" panose="020B0709000202000203" pitchFamily="49" charset="0"/>
-              </a:rPr>
-              <a:t>⎕NL</a:t>
-            </a:r>
-            <a:r>
-              <a:rPr lang="en-GB" dirty="0"/>
-              <a:t>)</a:t>
-            </a:r>
-          </a:p>
-        </p:txBody>
-      </p:sp>
-      <p:sp>
-        <p:nvSpPr>
-          <p:cNvPr id="4" name="Media Placeholder 3">
-            <a:extLst>
-              <a:ext uri="{FF2B5EF4-FFF2-40B4-BE49-F238E27FC236}">
-                <a16:creationId xmlns:a16="http://schemas.microsoft.com/office/drawing/2014/main" id="{A94F166C-F5C0-9193-6308-7BC8ECA43E7C}"/>
-              </a:ext>
-            </a:extLst>
-          </p:cNvPr>
-          <p:cNvSpPr>
-            <a:spLocks noGrp="1"/>
-          </p:cNvSpPr>
-          <p:nvPr>
-            <p:ph type="media" sz="quarter" idx="11"/>
-          </p:nvPr>
-        </p:nvSpPr>
-        <p:spPr/>
-        <p:txBody>
-          <a:bodyPr/>
-          <a:lstStyle/>
-          <a:p>
-            <a:endParaRPr lang="en-GB"/>
-          </a:p>
-        </p:txBody>
-      </p:sp>
-    </p:spTree>
-    <p:extLst>
-      <p:ext uri="{BB962C8B-B14F-4D97-AF65-F5344CB8AC3E}">
-        <p14:creationId xmlns:p14="http://schemas.microsoft.com/office/powerpoint/2010/main" val="4033421497"/>
-      </p:ext>
-    </p:extLst>
-  </p:cSld>
-  <p:clrMapOvr>
-    <a:masterClrMapping/>
-  </p:clrMapOvr>
-</p:sld>
-</file>
-
-<file path=ppt/slides/slide91.xml><?xml version="1.0" encoding="utf-8"?>
-<p:sld xmlns:a="http://schemas.openxmlformats.org/drawingml/2006/main" xmlns:r="http://schemas.openxmlformats.org/officeDocument/2006/relationships" xmlns:p="http://schemas.openxmlformats.org/presentationml/2006/main">
-  <p:cSld>
-    <p:spTree>
-      <p:nvGrpSpPr>
-        <p:cNvPr id="1" name="">
-          <a:extLst>
-            <a:ext uri="{FF2B5EF4-FFF2-40B4-BE49-F238E27FC236}">
               <a16:creationId xmlns:a16="http://schemas.microsoft.com/office/drawing/2014/main" id="{5AA185FD-33EA-4D4F-5A0D-0ABC7719A196}"/>
             </a:ext>
           </a:extLst>
@@ -48227,7 +47811,7 @@
 </p:sld>
 </file>
 
-<file path=ppt/slides/slide92.xml><?xml version="1.0" encoding="utf-8"?>
+<file path=ppt/slides/slide91.xml><?xml version="1.0" encoding="utf-8"?>
 <p:sld xmlns:a="http://schemas.openxmlformats.org/drawingml/2006/main" xmlns:r="http://schemas.openxmlformats.org/officeDocument/2006/relationships" xmlns:p="http://schemas.openxmlformats.org/presentationml/2006/main">
   <p:cSld>
     <p:spTree>
@@ -48578,7 +48162,7 @@
 </p:sld>
 </file>
 
-<file path=ppt/slides/slide93.xml><?xml version="1.0" encoding="utf-8"?>
+<file path=ppt/slides/slide92.xml><?xml version="1.0" encoding="utf-8"?>
 <p:sld xmlns:a="http://schemas.openxmlformats.org/drawingml/2006/main" xmlns:r="http://schemas.openxmlformats.org/officeDocument/2006/relationships" xmlns:p="http://schemas.openxmlformats.org/presentationml/2006/main">
   <p:cSld>
     <p:spTree>
@@ -49503,7 +49087,7 @@
 </p:sld>
 </file>
 
-<file path=ppt/slides/slide94.xml><?xml version="1.0" encoding="utf-8"?>
+<file path=ppt/slides/slide93.xml><?xml version="1.0" encoding="utf-8"?>
 <p:sld xmlns:a="http://schemas.openxmlformats.org/drawingml/2006/main" xmlns:r="http://schemas.openxmlformats.org/officeDocument/2006/relationships" xmlns:p="http://schemas.openxmlformats.org/presentationml/2006/main">
   <p:cSld>
     <p:spTree>
@@ -50069,7 +49653,7 @@
 </p:sld>
 </file>
 
-<file path=ppt/slides/slide95.xml><?xml version="1.0" encoding="utf-8"?>
+<file path=ppt/slides/slide94.xml><?xml version="1.0" encoding="utf-8"?>
 <p:sld xmlns:a="http://schemas.openxmlformats.org/drawingml/2006/main" xmlns:r="http://schemas.openxmlformats.org/officeDocument/2006/relationships" xmlns:p="http://schemas.openxmlformats.org/presentationml/2006/main">
   <p:cSld>
     <p:spTree>
@@ -50755,7 +50339,7 @@
 </p:sld>
 </file>
 
-<file path=ppt/slides/slide96.xml><?xml version="1.0" encoding="utf-8"?>
+<file path=ppt/slides/slide95.xml><?xml version="1.0" encoding="utf-8"?>
 <p:sld xmlns:a="http://schemas.openxmlformats.org/drawingml/2006/main" xmlns:r="http://schemas.openxmlformats.org/officeDocument/2006/relationships" xmlns:p="http://schemas.openxmlformats.org/presentationml/2006/main">
   <p:cSld>
     <p:spTree>
@@ -50965,7 +50549,7 @@
 </p:sld>
 </file>
 
-<file path=ppt/slides/slide97.xml><?xml version="1.0" encoding="utf-8"?>
+<file path=ppt/slides/slide96.xml><?xml version="1.0" encoding="utf-8"?>
 <p:sld xmlns:a="http://schemas.openxmlformats.org/drawingml/2006/main" xmlns:r="http://schemas.openxmlformats.org/officeDocument/2006/relationships" xmlns:p="http://schemas.openxmlformats.org/presentationml/2006/main">
   <p:cSld>
     <p:spTree>
@@ -51159,7 +50743,7 @@
 </p:sld>
 </file>
 
-<file path=ppt/slides/slide98.xml><?xml version="1.0" encoding="utf-8"?>
+<file path=ppt/slides/slide97.xml><?xml version="1.0" encoding="utf-8"?>
 <p:sld xmlns:a="http://schemas.openxmlformats.org/drawingml/2006/main" xmlns:r="http://schemas.openxmlformats.org/officeDocument/2006/relationships" xmlns:p="http://schemas.openxmlformats.org/presentationml/2006/main">
   <p:cSld>
     <p:spTree>
@@ -51564,7 +51148,7 @@
 </p:sld>
 </file>
 
-<file path=ppt/slides/slide99.xml><?xml version="1.0" encoding="utf-8"?>
+<file path=ppt/slides/slide98.xml><?xml version="1.0" encoding="utf-8"?>
 <p:sld xmlns:a="http://schemas.openxmlformats.org/drawingml/2006/main" xmlns:r="http://schemas.openxmlformats.org/officeDocument/2006/relationships" xmlns:p="http://schemas.openxmlformats.org/presentationml/2006/main">
   <p:cSld>
     <p:spTree>
@@ -51799,6 +51383,216 @@
     <p:extLst>
       <p:ext uri="{BB962C8B-B14F-4D97-AF65-F5344CB8AC3E}">
         <p14:creationId xmlns:p14="http://schemas.microsoft.com/office/powerpoint/2010/main" val="2592448612"/>
+      </p:ext>
+    </p:extLst>
+  </p:cSld>
+  <p:clrMapOvr>
+    <a:masterClrMapping/>
+  </p:clrMapOvr>
+</p:sld>
+</file>
+
+<file path=ppt/slides/slide99.xml><?xml version="1.0" encoding="utf-8"?>
+<p:sld xmlns:a="http://schemas.openxmlformats.org/drawingml/2006/main" xmlns:r="http://schemas.openxmlformats.org/officeDocument/2006/relationships" xmlns:p="http://schemas.openxmlformats.org/presentationml/2006/main">
+  <p:cSld>
+    <p:spTree>
+      <p:nvGrpSpPr>
+        <p:cNvPr id="1" name=""/>
+        <p:cNvGrpSpPr/>
+        <p:nvPr/>
+      </p:nvGrpSpPr>
+      <p:grpSpPr>
+        <a:xfrm>
+          <a:off x="0" y="0"/>
+          <a:ext cx="0" cy="0"/>
+          <a:chOff x="0" y="0"/>
+          <a:chExt cx="0" cy="0"/>
+        </a:xfrm>
+      </p:grpSpPr>
+      <p:sp>
+        <p:nvSpPr>
+          <p:cNvPr id="2" name="Content Placeholder 1">
+            <a:extLst>
+              <a:ext uri="{FF2B5EF4-FFF2-40B4-BE49-F238E27FC236}">
+                <a16:creationId xmlns:a16="http://schemas.microsoft.com/office/drawing/2014/main" id="{BEC7A5DF-6C8B-A621-C3FB-7F787F004486}"/>
+              </a:ext>
+            </a:extLst>
+          </p:cNvPr>
+          <p:cNvSpPr>
+            <a:spLocks noGrp="1"/>
+          </p:cNvSpPr>
+          <p:nvPr>
+            <p:ph idx="1"/>
+          </p:nvPr>
+        </p:nvSpPr>
+        <p:spPr/>
+        <p:txBody>
+          <a:bodyPr/>
+          <a:lstStyle/>
+          <a:p>
+            <a:pPr marL="0" indent="0">
+              <a:buNone/>
+            </a:pPr>
+            <a:r>
+              <a:rPr lang="en-GB" dirty="0">
+                <a:solidFill>
+                  <a:schemeClr val="tx1"/>
+                </a:solidFill>
+                <a:latin typeface="Arial" charset="0"/>
+                <a:cs typeface="Arial" charset="0"/>
+              </a:rPr>
+              <a:t>This function provides an access to DLLs and external routines in the OS.</a:t>
+            </a:r>
+          </a:p>
+          <a:p>
+            <a:pPr marL="0" indent="0">
+              <a:buNone/>
+            </a:pPr>
+            <a:r>
+              <a:rPr lang="en-GB" sz="2100" dirty="0">
+                <a:solidFill>
+                  <a:schemeClr val="accent3">
+                    <a:lumMod val="50000"/>
+                  </a:schemeClr>
+                </a:solidFill>
+                <a:latin typeface="APL385 Unicode" panose="020B0709000202000203" pitchFamily="49" charset="0"/>
+                <a:cs typeface="Arial" charset="0"/>
+              </a:rPr>
+              <a:t>	</a:t>
+            </a:r>
+            <a:r>
+              <a:rPr lang="en-GB" sz="2100" dirty="0">
+                <a:solidFill>
+                  <a:srgbClr val="00B050"/>
+                </a:solidFill>
+                <a:latin typeface="APL385 Unicode" panose="020B0709000202000203" pitchFamily="49" charset="0"/>
+              </a:rPr>
+              <a:t>'div' ⎕NA 'F8 </a:t>
+            </a:r>
+            <a:r>
+              <a:rPr lang="en-GB" sz="2100" dirty="0" err="1">
+                <a:solidFill>
+                  <a:srgbClr val="00B050"/>
+                </a:solidFill>
+                <a:latin typeface="APL385 Unicode" panose="020B0709000202000203" pitchFamily="49" charset="0"/>
+              </a:rPr>
+              <a:t>math|divide</a:t>
+            </a:r>
+            <a:r>
+              <a:rPr lang="en-GB" sz="2100" dirty="0">
+                <a:solidFill>
+                  <a:srgbClr val="00B050"/>
+                </a:solidFill>
+                <a:latin typeface="APL385 Unicode" panose="020B0709000202000203" pitchFamily="49" charset="0"/>
+              </a:rPr>
+              <a:t> I4 </a:t>
+            </a:r>
+            <a:r>
+              <a:rPr lang="en-GB" sz="2100" dirty="0" err="1">
+                <a:solidFill>
+                  <a:srgbClr val="00B050"/>
+                </a:solidFill>
+                <a:latin typeface="APL385 Unicode" panose="020B0709000202000203" pitchFamily="49" charset="0"/>
+              </a:rPr>
+              <a:t>I4</a:t>
+            </a:r>
+            <a:r>
+              <a:rPr lang="en-GB" sz="2100" dirty="0">
+                <a:solidFill>
+                  <a:srgbClr val="00B050"/>
+                </a:solidFill>
+                <a:latin typeface="APL385 Unicode" panose="020B0709000202000203" pitchFamily="49" charset="0"/>
+              </a:rPr>
+              <a:t>'</a:t>
+            </a:r>
+          </a:p>
+          <a:p>
+            <a:pPr marL="0" indent="0">
+              <a:buNone/>
+            </a:pPr>
+            <a:endParaRPr lang="en-GB" dirty="0"/>
+          </a:p>
+          <a:p>
+            <a:pPr marL="0" indent="0">
+              <a:buNone/>
+            </a:pPr>
+            <a:r>
+              <a:rPr lang="en-GB" dirty="0"/>
+              <a:t>The "C FFI" for Dyalog</a:t>
+            </a:r>
+          </a:p>
+        </p:txBody>
+      </p:sp>
+      <p:sp>
+        <p:nvSpPr>
+          <p:cNvPr id="3" name="Title 2">
+            <a:extLst>
+              <a:ext uri="{FF2B5EF4-FFF2-40B4-BE49-F238E27FC236}">
+                <a16:creationId xmlns:a16="http://schemas.microsoft.com/office/drawing/2014/main" id="{3276318F-1B4D-3EE9-008D-87C23877481B}"/>
+              </a:ext>
+            </a:extLst>
+          </p:cNvPr>
+          <p:cNvSpPr>
+            <a:spLocks noGrp="1"/>
+          </p:cNvSpPr>
+          <p:nvPr>
+            <p:ph type="title"/>
+          </p:nvPr>
+        </p:nvSpPr>
+        <p:spPr/>
+        <p:txBody>
+          <a:bodyPr/>
+          <a:lstStyle/>
+          <a:p>
+            <a:r>
+              <a:rPr lang="en-GB" dirty="0"/>
+              <a:t>Name Association (</a:t>
+            </a:r>
+            <a:r>
+              <a:rPr lang="en-GB" dirty="0">
+                <a:solidFill>
+                  <a:srgbClr val="FF6600"/>
+                </a:solidFill>
+                <a:latin typeface="APL385 Unicode" panose="020B0709000202000203" pitchFamily="49" charset="0"/>
+              </a:rPr>
+              <a:t>⎕NA</a:t>
+            </a:r>
+            <a:r>
+              <a:rPr lang="en-GB" dirty="0"/>
+              <a:t>)</a:t>
+            </a:r>
+          </a:p>
+        </p:txBody>
+      </p:sp>
+      <p:sp>
+        <p:nvSpPr>
+          <p:cNvPr id="4" name="Media Placeholder 3">
+            <a:extLst>
+              <a:ext uri="{FF2B5EF4-FFF2-40B4-BE49-F238E27FC236}">
+                <a16:creationId xmlns:a16="http://schemas.microsoft.com/office/drawing/2014/main" id="{BE650FD4-34B1-647F-7AAC-4249730B1FC0}"/>
+              </a:ext>
+            </a:extLst>
+          </p:cNvPr>
+          <p:cNvSpPr>
+            <a:spLocks noGrp="1"/>
+          </p:cNvSpPr>
+          <p:nvPr>
+            <p:ph type="media" sz="quarter" idx="11"/>
+          </p:nvPr>
+        </p:nvSpPr>
+        <p:spPr/>
+        <p:txBody>
+          <a:bodyPr/>
+          <a:lstStyle/>
+          <a:p>
+            <a:endParaRPr lang="en-GB"/>
+          </a:p>
+        </p:txBody>
+      </p:sp>
+    </p:spTree>
+    <p:extLst>
+      <p:ext uri="{BB962C8B-B14F-4D97-AF65-F5344CB8AC3E}">
+        <p14:creationId xmlns:p14="http://schemas.microsoft.com/office/powerpoint/2010/main" val="215498922"/>
       </p:ext>
     </p:extLst>
   </p:cSld>

--- a/slides/APL_Bootcamp-part-7-operators-sysfns.pptx
+++ b/slides/APL_Bootcamp-part-7-operators-sysfns.pptx
@@ -386,7 +386,7 @@
               <a:rPr lang="en-GB" smtClean="0">
                 <a:latin typeface="Sarabun" panose="00000500000000000000" pitchFamily="2" charset="-34"/>
               </a:rPr>
-              <a:t>15/08/2025</a:t>
+              <a:t>20/08/2025</a:t>
             </a:fld>
             <a:endParaRPr lang="en-GB" dirty="0">
               <a:latin typeface="Sarabun" panose="00000500000000000000" pitchFamily="2" charset="-34"/>
@@ -564,7 +564,7 @@
             <a:fld id="{CDEAEF8A-5BB8-41C8-B8C2-160617C17EF4}" type="datetimeFigureOut">
               <a:rPr lang="en-GB" smtClean="0"/>
               <a:pPr/>
-              <a:t>15/08/2025</a:t>
+              <a:t>20/08/2025</a:t>
             </a:fld>
             <a:endParaRPr lang="en-GB" dirty="0"/>
           </a:p>
@@ -23887,7 +23887,7 @@
                 </a:solidFill>
                 <a:latin typeface="APL385 Unicode" panose="020B0709000202000203" pitchFamily="49" charset="0"/>
               </a:rPr>
-              <a:t>+</a:t>
+              <a:t>∧</a:t>
             </a:r>
             <a:r>
               <a:rPr lang="en-GB" sz="1600" dirty="0">
@@ -23902,7 +23902,7 @@
                 </a:solidFill>
                 <a:latin typeface="APL385 Unicode" panose="020B0709000202000203" pitchFamily="49" charset="0"/>
               </a:rPr>
-              <a:t>×</a:t>
+              <a:t>=</a:t>
             </a:r>
             <a:r>
               <a:rPr lang="en-GB" sz="1600" dirty="0">
@@ -24075,7 +24075,13 @@
           <p:cNvGraphicFramePr>
             <a:graphicFrameLocks noGrp="1"/>
           </p:cNvGraphicFramePr>
-          <p:nvPr/>
+          <p:nvPr>
+            <p:extLst>
+              <p:ext uri="{D42A27DB-BD31-4B8C-83A1-F6EECF244321}">
+                <p14:modId xmlns:p14="http://schemas.microsoft.com/office/powerpoint/2010/main" val="2116141862"/>
+              </p:ext>
+            </p:extLst>
+          </p:nvPr>
         </p:nvGraphicFramePr>
         <p:xfrm>
           <a:off x="1824008" y="4109280"/>
@@ -24112,7 +24118,7 @@
                       <a:pPr algn="r"/>
                       <a:r>
                         <a:rPr lang="en-GB" sz="1400" dirty="0"/>
-                        <a:t>¯1</a:t>
+                        <a:t>0</a:t>
                       </a:r>
                     </a:p>
                   </a:txBody>
@@ -24126,7 +24132,7 @@
                       <a:pPr algn="r"/>
                       <a:r>
                         <a:rPr lang="en-GB" sz="1400" dirty="0"/>
-                        <a:t>5</a:t>
+                        <a:t>1</a:t>
                       </a:r>
                     </a:p>
                   </a:txBody>
@@ -24147,7 +24153,7 @@
                       <a:pPr algn="r"/>
                       <a:r>
                         <a:rPr lang="en-GB" sz="1400" dirty="0"/>
-                        <a:t>¯2</a:t>
+                        <a:t>0</a:t>
                       </a:r>
                     </a:p>
                   </a:txBody>
@@ -24161,7 +24167,7 @@
                       <a:pPr algn="r"/>
                       <a:r>
                         <a:rPr lang="en-GB" sz="1400" dirty="0"/>
-                        <a:t>¯1</a:t>
+                        <a:t>0</a:t>
                       </a:r>
                     </a:p>
                   </a:txBody>
@@ -24368,7 +24374,7 @@
                 </a:solidFill>
                 <a:latin typeface="APL385 Unicode" panose="020B0709000202000203" pitchFamily="49" charset="0"/>
               </a:rPr>
-              <a:t>+</a:t>
+              <a:t>∧</a:t>
             </a:r>
             <a:r>
               <a:rPr lang="en-GB" sz="1600" dirty="0">
@@ -24383,7 +24389,7 @@
                 </a:solidFill>
                 <a:latin typeface="APL385 Unicode" panose="020B0709000202000203" pitchFamily="49" charset="0"/>
               </a:rPr>
-              <a:t>×</a:t>
+              <a:t>=</a:t>
             </a:r>
             <a:r>
               <a:rPr lang="en-GB" sz="1600" dirty="0">
@@ -24575,7 +24581,7 @@
         <p:spPr>
           <a:xfrm>
             <a:off x="3429000" y="4275905"/>
-            <a:ext cx="2694969" cy="338554"/>
+            <a:ext cx="4588115" cy="338554"/>
           </a:xfrm>
           <a:prstGeom prst="rect">
             <a:avLst/>
@@ -24604,7 +24610,31 @@
               <a:rPr lang="en-GB" sz="1600" dirty="0">
                 <a:latin typeface="+mj-lt"/>
               </a:rPr>
-              <a:t>is "are any identical?")</a:t>
+              <a:t>is "rows in </a:t>
+            </a:r>
+            <a:r>
+              <a:rPr lang="en-GB" sz="1600" dirty="0">
+                <a:latin typeface="APL385 Unicode" panose="020B0709000202000203" pitchFamily="49" charset="0"/>
+              </a:rPr>
+              <a:t>m1</a:t>
+            </a:r>
+            <a:r>
+              <a:rPr lang="en-GB" sz="1600" dirty="0">
+                <a:latin typeface="+mj-lt"/>
+              </a:rPr>
+              <a:t> identical to columns in </a:t>
+            </a:r>
+            <a:r>
+              <a:rPr lang="en-GB" sz="1600" dirty="0">
+                <a:latin typeface="APL385 Unicode" panose="020B0709000202000203" pitchFamily="49" charset="0"/>
+              </a:rPr>
+              <a:t>m2</a:t>
+            </a:r>
+            <a:r>
+              <a:rPr lang="en-GB" sz="1600" dirty="0">
+                <a:latin typeface="+mj-lt"/>
+              </a:rPr>
+              <a:t>?")</a:t>
             </a:r>
           </a:p>
         </p:txBody>
